--- a/01-slides/W04-Requirements-and-Use-Case-Modeling.pptx
+++ b/01-slides/W04-Requirements-and-Use-Case-Modeling.pptx
@@ -21643,7 +21643,7 @@
   <p:cSld>
     <p:spTree>
       <p:nvGrpSpPr>
-        <p:cNvPr id="519" name="" descr="&lt;Slide style={{ background: '#FFFFFF', padding: 0 }}&gt;&#10;  &lt;Box style={{ height: 72, background: '#1E4FA8', padding: '0 40px', flexDirection: 'row', alignItems: 'center', justifyContent: 'space-between' }}&gt;&#10;    &lt;Text style={{ fontSize: 15, color: '#B9CDF0', letterSpacing: 1 }}&gt;ISAD · INFORMATION SYSTEMS ANALYSIS &amp;amp; DESIGN&lt;/Text&gt;&#10;    &lt;Text style={{ fontSize: 15, color: '#B9CDF0' }}&gt;W04 · FINDING USE CASES&lt;/Text&gt;&#10;  &lt;/Box&gt;&#10;  &lt;Box style={{ padding: '14px 40px 0 40px', flexDirection: 'row', alignItems: 'center', justifyContent: 'space-between' }}&gt;&#10;    &lt;Text style={{ fontSize: 29, fontWeight: 'bold', color: '#0E3F8C' }}&gt;What We Have Not Done Yet&lt;/Text&gt;&#10;    &lt;Text style={{ fontSize: 14, color: '#1E4FA8', fontWeight: 'bold' }}&gt;29 / 38&lt;/Text&gt;&#10;  &lt;/Box&gt;&#10;  &lt;Box style={{ flex: 1, padding: '16px 60px 0 60px', flexDirection: 'column', justifyContent: 'center', alignItems: 'center' }}&gt;&#10;    &lt;Box style={{ width: 960, padding: '20px 30px', background: '#FFF6E0', borderRadius: 10, borderLeft: '6px solid #FFC107', marginBottom: 20 }}&gt;&#10;      &lt;Text style={{ fontSize: 23, color: '#0E3F8C', fontWeight: 'bold', lineHeight: 1.4, textAlign: 'center' }}&gt;&#10;        A named ellipse is a promise to write something.&#10;        &lt;br /&gt;&#10;        The promise is kept next week.&#10;      &lt;/Text&gt;&#10;    &lt;/Box&gt;&#10;    &lt;Box style={{ width: 960, flexDirection: 'row', gap: 18 }}&gt;&#10;      &lt;Box style={{ flex: 1, padding: '20px 18px', background: '#FFFFFF', borderRadius: 10, border: '1px solid #D6DCE5' }}&gt;&#10;        &lt;Box style={{ flexDirection: 'row', alignItems: 'center', gap: 8, marginBottom: 8 }}&gt;&#10;          &lt;FAIcon name='info-circle' style={{ fill: '#1E4FA8', width: 20, height: 20 }} /&gt;&#10;          &lt;Text style={{ fontSize: 16, fontWeight: 'bold', color: '#0E3F8C' }}&gt;Not yet: the use case text&lt;/Text&gt;&#10;        &lt;/Box&gt;&#10;        &lt;Text style={{ fontSize: 12.8, color: '#4A5568', lineHeight: 1.65 }}&gt;&#10;          “Place Order” on a diagram tells you a goal exists. It does not tell you what happens when the card is declined, or what must be true before the student starts. That is the use case specification — &lt;Text style={{ fontWeight: 'bold', color: '#0E3F8C' }}&gt;Week 05&lt;/Text&gt;.&#10;        &lt;/Text&gt;&#10;      &lt;/Box&gt;&#10;      &lt;Box style={{ flex: 1, padding: '20px 18px', background: '#FFFFFF', borderRadius: 10, border: '1px solid #D6DCE5' }}&gt;&#10;        &lt;Box style={{ flexDirection: 'row', alignItems: 'center', gap: 8, marginBottom: 8 }}&gt;&#10;          &lt;FAIcon name='layer-group' style={{ fill: '#1E4FA8', width: 20, height: 20 }} /&gt;&#10;          &lt;Text style={{ fontSize: 16, fontWeight: 'bold', color: '#0E3F8C' }}&gt;Not yet: the domain model&lt;/Text&gt;&#10;        &lt;/Box&gt;&#10;        &lt;Text style={{ fontSize: 12.8, color: '#4A5568', lineHeight: 1.65 }}&gt;&#10;          Order, MenuItem and Courier are names on this page. Turning them into classes with attributes and associations is a different artefact — &lt;Text style={{ fontWeight: 'bold', color: '#0E3F8C' }}&gt;Week 06&lt;/Text&gt;. Resist the urge to draw boxes today.&#10;        &lt;/Text&gt;&#10;      &lt;/Box&gt;&#10;      &lt;Box style={{ flex: 1, padding: '20px 18px', background: '#F0F5FC', borderRadius: 10, border: '1px solid #1E4FA8' }}&gt;&#10;        &lt;Box style={{ flexDirection: 'row', alignItems: 'center', gap: 8, marginBottom: 8 }}&gt;&#10;          &lt;FAIcon name='handshake' style={{ fill: '#1E4FA8', width: 20, height: 20 }} /&gt;&#10;          &lt;Text style={{ fontSize: 16, fontWeight: 'bold', color: '#0E3F8C' }}&gt;Next week: you are the client&lt;/Text&gt;&#10;        &lt;/Box&gt;&#10;        &lt;Text style={{ fontSize: 12.8, color: '#4A5568', lineHeight: 1.65 }}&gt;&#10;          In Week 05 the two teams swap packs and review each other as the client. Bring a diagram you can defend, because the other team will ask why “Manage Order” is on it.&#10;        &lt;/Text&gt;&#10;      &lt;/Box&gt;&#10;    &lt;/Box&gt;&#10;  &lt;/Box&gt;&#10;  &lt;Box style={{ height: 46, background: '#0E3F8C', padding: '0 40px', flexDirection: 'row', alignItems: 'center', justifyContent: 'center' }}&gt;&#10;    &lt;Text style={{ fontSize: 16, color: '#FFFFFF', fontWeight: '600' }}&gt;This week you find the goals. Next week you write them down so a stranger could build them.&lt;/Text&gt;&#10;  &lt;/Box&gt;&#10;&lt;/Slide&gt;"/>
+        <p:cNvPr id="519" name="" descr="&lt;Slide style={{ background: '#FFFFFF', padding: 0 }}&gt;&#10;  &lt;Box style={{ height: 72, background: '#1E4FA8', padding: '0 40px', flexDirection: 'row', alignItems: 'center', justifyContent: 'space-between' }}&gt;&#10;    &lt;Text style={{ fontSize: 15, color: '#B9CDF0', letterSpacing: 1 }}&gt;ISAD · INFORMATION SYSTEMS ANALYSIS &amp;amp; DESIGN&lt;/Text&gt;&#10;    &lt;Text style={{ fontSize: 15, color: '#B9CDF0' }}&gt;W04 · FINDING USE CASES&lt;/Text&gt;&#10;  &lt;/Box&gt;&#10;  &lt;Box style={{ padding: '14px 40px 0 40px', flexDirection: 'row', alignItems: 'center', justifyContent: 'space-between' }}&gt;&#10;    &lt;Text style={{ fontSize: 29, fontWeight: 'bold', color: '#0E3F8C' }}&gt;What We Have Not Done Yet&lt;/Text&gt;&#10;    &lt;Text style={{ fontSize: 14, color: '#1E4FA8', fontWeight: 'bold' }}&gt;29 / 38&lt;/Text&gt;&#10;  &lt;/Box&gt;&#10;  &lt;Box style={{ flex: 1, padding: '16px 60px 0 60px', flexDirection: 'column', justifyContent: 'center', alignItems: 'center' }}&gt;&#10;    &lt;Box style={{ width: 960, padding: '20px 30px', background: '#FFF6E0', borderRadius: 10, borderLeft: '6px solid #FFC107', marginBottom: 20 }}&gt;&#10;      &lt;Text style={{ fontSize: 23, color: '#0E3F8C', fontWeight: 'bold', lineHeight: 1.4, textAlign: 'center' }}&gt;&#10;        A named ellipse is a promise to write something.&#10;        &lt;br /&gt;&#10;        The promise is kept next week.&#10;      &lt;/Text&gt;&#10;    &lt;/Box&gt;&#10;    &lt;Box style={{ width: 960, flexDirection: 'row', gap: 18 }}&gt;&#10;      &lt;Box style={{ flex: 1, padding: '20px 18px', background: '#FFFFFF', borderRadius: 10, border: '1px solid #D6DCE5' }}&gt;&#10;        &lt;Box style={{ flexDirection: 'row', alignItems: 'center', gap: 8, marginBottom: 8 }}&gt;&#10;          &lt;FAIcon name='info-circle' style={{ fill: '#1E4FA8', width: 20, height: 20 }} /&gt;&#10;          &lt;Text style={{ fontSize: 16, fontWeight: 'bold', color: '#0E3F8C' }}&gt;Not yet: the use case text&lt;/Text&gt;&#10;        &lt;/Box&gt;&#10;        &lt;Text style={{ fontSize: 12.8, color: '#4A5568', lineHeight: 1.65 }}&gt;&#10;          “Place Order” on a diagram tells you a goal exists. It does not tell you what happens when the card is declined, or what must be true before the student starts. That is the use case specification — &lt;Text style={{ fontWeight: 'bold', color: '#0E3F8C' }}&gt;Week 05&lt;/Text&gt;.&#10;        &lt;/Text&gt;&#10;      &lt;/Box&gt;&#10;      &lt;Box style={{ flex: 1, padding: '20px 18px', background: '#FFFFFF', borderRadius: 10, border: '1px solid #D6DCE5' }}&gt;&#10;        &lt;Box style={{ flexDirection: 'row', alignItems: 'center', gap: 8, marginBottom: 8 }}&gt;&#10;          &lt;FAIcon name='layer-group' style={{ fill: '#1E4FA8', width: 20, height: 20 }} /&gt;&#10;          &lt;Text style={{ fontSize: 16, fontWeight: 'bold', color: '#0E3F8C' }}&gt;Not yet: the domain model&lt;/Text&gt;&#10;        &lt;/Box&gt;&#10;        &lt;Text style={{ fontSize: 12.8, color: '#4A5568', lineHeight: 1.65 }}&gt;&#10;          Order, MenuItem and Courier are names on this page. Turning them into classes with attributes and associations is a different artefact — &lt;Text style={{ fontWeight: 'bold', color: '#0E3F8C' }}&gt;Week 06&lt;/Text&gt;. Resist the urge to draw boxes today.&#10;        &lt;/Text&gt;&#10;      &lt;/Box&gt;&#10;      &lt;Box style={{ flex: 1, padding: '20px 18px', background: '#F0F5FC', borderRadius: 10, border: '1px solid #1E4FA8' }}&gt;&#10;        &lt;Box style={{ flexDirection: 'row', alignItems: 'center', gap: 8, marginBottom: 8 }}&gt;&#10;          &lt;FAIcon name='handshake' style={{ fill: '#1E4FA8', width: 20, height: 20 }} /&gt;&#10;          &lt;Text style={{ fontSize: 16, fontWeight: 'bold', color: '#0E3F8C' }}&gt;Next week: you are the client&lt;/Text&gt;&#10;        &lt;/Box&gt;&#10;        &lt;Text style={{ fontSize: 12.8, color: '#4A5568', lineHeight: 1.65 }}&gt;&#10;          In Week 05 the instructor plays the client and reviews your pack with you. Bring a diagram you can defend, because the other team will ask why “Manage Order” is on it.&#10;        &lt;/Text&gt;&#10;      &lt;/Box&gt;&#10;    &lt;/Box&gt;&#10;  &lt;/Box&gt;&#10;  &lt;Box style={{ height: 46, background: '#0E3F8C', padding: '0 40px', flexDirection: 'row', alignItems: 'center', justifyContent: 'center' }}&gt;&#10;    &lt;Text style={{ fontSize: 16, color: '#FFFFFF', fontWeight: '600' }}&gt;This week you find the goals. Next week you write them down so a stranger could build them.&lt;/Text&gt;&#10;  &lt;/Box&gt;&#10;&lt;/Slide&gt;"/>
         <p:cNvGrpSpPr/>
         <p:nvPr/>
       </p:nvGrpSpPr>
@@ -22415,7 +22415,7 @@
                 <a:latin typeface="Microsoft YaHei"/>
                 <a:ea typeface="Microsoft YaHei"/>
               </a:rPr>
-              <a:t>In Week 05 the two teams swap packs and review each other as the client. Bring a diagram you can defend, because the other team will ask why “Manage Order” is on it.</a:t>
+              <a:t>In Week 05 the instructor plays the client and reviews your pack with you. Bring a diagram you can defend, because the other team will ask why “Manage Order” is on it.</a:t>
             </a:r>
             <a:endParaRPr/>
           </a:p>
@@ -32318,7 +32318,7 @@
   <p:cSld>
     <p:spTree>
       <p:nvGrpSpPr>
-        <p:cNvPr id="725" name="" descr="&lt;Slide style={{ background: '#0E3F8C', padding: 0 }}&gt;&#10;  &lt;Box style={{ flexDirection: 'column', height: '100%', position: 'relative', padding: '0 80px', justifyContent: 'center' }}&gt;&#10;    &lt;Box style={{ position: 'absolute', top: 0, left: 0, right: 0, height: 8, background: '#1E4FA8' }} /&gt;&#10;    &lt;Text style={{ fontSize: 15, color: '#7FA2D6', letterSpacing: 2, marginBottom: 16 }}&gt;WEEK 04 · WHAT YOU TAKE AWAY&lt;/Text&gt;&#10;    &lt;Text style={{ fontSize: 44, fontWeight: 'bold', color: '#FFFFFF', fontFamily: 'Georgia, serif', lineHeight: 1.15 }}&gt;&#10;      Goals first.&#10;      &lt;br /&gt;&#10;      Notation second.&#10;    &lt;/Text&gt;&#10;    &lt;Box style={{ width: 88, height: 5, background: '#FFC107', marginTop: 24, marginBottom: 26 }} /&gt;&#10;    &lt;Box style={{ flexDirection: 'row', flexWrap: 'wrap', gap: '12px 28px', marginBottom: 30 }}&gt;&#10;      {[&#10;        '01 · Functional says what, non-functional says how well',&#10;        '02 · An actor is a role; a use case is a goal',&#10;        '03 · Six symbols, and the boundary is one of them',&#10;        '04 · include is inevitable, extend is conditional',&#10;        '05 · Events and the noun-verb scan find the goals',&#10;        '06 · M1 opened today — tag it m1 by 4 October',&#10;      ].map((t) =&gt; (&#10;        &lt;Box key={t} style={{ flexDirection: 'row', alignItems: 'center', gap: 10, width: '48%' }}&gt;&#10;          &lt;Box style={{ width: 7, height: 7, borderRadius: 4, background: '#3D7BD9' }} /&gt;&#10;          &lt;Text style={{ fontSize: 15.5, color: '#C5D4EA' }}&gt;{t}&lt;/Text&gt;&#10;        &lt;/Box&gt;&#10;      ))}&#10;    &lt;/Box&gt;&#10;    &lt;Box style={{ borderTop: '1px solid #2B5793', paddingTop: 20, flexDirection: 'row', justifyContent: 'space-between', alignItems: 'center' }}&gt;&#10;      &lt;Box style={{ flex: 1 }}&gt;&#10;        &lt;Text style={{ fontSize: 14, color: '#7FA2D6', letterSpacing: 1, marginBottom: 6 }}&gt;NEXT WEEK — W05&lt;/Text&gt;&#10;        &lt;Text style={{ fontSize: 19, color: '#FFFFFF', fontWeight: '600' }}&gt;&#10;          Writing the Use Case — and reviewing the other team as their client&#10;        &lt;/Text&gt;&#10;      &lt;/Box&gt;&#10;      &lt;Box style={{ padding: '10px 22px', background: '#1E4FA8', borderRadius: 22 }}&gt;&#10;        &lt;Text style={{ fontSize: 15, color: '#FFFFFF', fontWeight: 'bold' }}&gt;Questions?&lt;/Text&gt;&#10;      &lt;/Box&gt;&#10;    &lt;/Box&gt;&#10;  &lt;/Box&gt;&#10;&lt;/Slide&gt;"/>
+        <p:cNvPr id="725" name="" descr="&lt;Slide style={{ background: '#0E3F8C', padding: 0 }}&gt;&#10;  &lt;Box style={{ flexDirection: 'column', height: '100%', position: 'relative', padding: '0 80px', justifyContent: 'center' }}&gt;&#10;    &lt;Box style={{ position: 'absolute', top: 0, left: 0, right: 0, height: 8, background: '#1E4FA8' }} /&gt;&#10;    &lt;Text style={{ fontSize: 15, color: '#7FA2D6', letterSpacing: 2, marginBottom: 16 }}&gt;WEEK 04 · WHAT YOU TAKE AWAY&lt;/Text&gt;&#10;    &lt;Text style={{ fontSize: 44, fontWeight: 'bold', color: '#FFFFFF', fontFamily: 'Georgia, serif', lineHeight: 1.15 }}&gt;&#10;      Goals first.&#10;      &lt;br /&gt;&#10;      Notation second.&#10;    &lt;/Text&gt;&#10;    &lt;Box style={{ width: 88, height: 5, background: '#FFC107', marginTop: 24, marginBottom: 26 }} /&gt;&#10;    &lt;Box style={{ flexDirection: 'row', flexWrap: 'wrap', gap: '12px 28px', marginBottom: 30 }}&gt;&#10;      {[&#10;        '01 · Functional says what, non-functional says how well',&#10;        '02 · An actor is a role; a use case is a goal',&#10;        '03 · Six symbols, and the boundary is one of them',&#10;        '04 · include is inevitable, extend is conditional',&#10;        '05 · Events and the noun-verb scan find the goals',&#10;        '06 · M1 opened today — tag it m1 by 4 October',&#10;      ].map((t) =&gt; (&#10;        &lt;Box key={t} style={{ flexDirection: 'row', alignItems: 'center', gap: 10, width: '48%' }}&gt;&#10;          &lt;Box style={{ width: 7, height: 7, borderRadius: 4, background: '#3D7BD9' }} /&gt;&#10;          &lt;Text style={{ fontSize: 15.5, color: '#C5D4EA' }}&gt;{t}&lt;/Text&gt;&#10;        &lt;/Box&gt;&#10;      ))}&#10;    &lt;/Box&gt;&#10;    &lt;Box style={{ borderTop: '1px solid #2B5793', paddingTop: 20, flexDirection: 'row', justifyContent: 'space-between', alignItems: 'center' }}&gt;&#10;      &lt;Box style={{ flex: 1 }}&gt;&#10;        &lt;Text style={{ fontSize: 14, color: '#7FA2D6', letterSpacing: 1, marginBottom: 6 }}&gt;NEXT WEEK — W05&lt;/Text&gt;&#10;        &lt;Text style={{ fontSize: 19, color: '#FFFFFF', fontWeight: '600' }}&gt;&#10;          Writing the Use Case — and being reviewed by the client&#10;        &lt;/Text&gt;&#10;      &lt;/Box&gt;&#10;      &lt;Box style={{ padding: '10px 22px', background: '#1E4FA8', borderRadius: 22 }}&gt;&#10;        &lt;Text style={{ fontSize: 15, color: '#FFFFFF', fontWeight: 'bold' }}&gt;Questions?&lt;/Text&gt;&#10;      &lt;/Box&gt;&#10;    &lt;/Box&gt;&#10;  &lt;/Box&gt;&#10;&lt;/Slide&gt;"/>
         <p:cNvGrpSpPr/>
         <p:nvPr/>
       </p:nvGrpSpPr>
@@ -32936,7 +32936,7 @@
                 <a:latin typeface="Microsoft YaHei"/>
                 <a:ea typeface="Microsoft YaHei"/>
               </a:rPr>
-              <a:t>Writing the Use Case — and reviewing the other team as their client</a:t>
+              <a:t>Writing the Use Case — and being reviewed by the client</a:t>
             </a:r>
             <a:endParaRPr/>
           </a:p>

--- a/01-slides/W04-Requirements-and-Use-Case-Modeling.pptx
+++ b/01-slides/W04-Requirements-and-Use-Case-Modeling.pptx
@@ -36221,7 +36221,7 @@
   <p:cSld>
     <p:spTree>
       <p:nvGrpSpPr>
-        <p:cNvPr id="819" name="" descr="&lt;Slide style={{ background: '#FFFFFF', padding: 0 }}&gt;&#10;  &lt;Box style={{ height: 72, background: '#1E4FA8', padding: '0 40px', flexDirection: 'row', alignItems: 'center', justifyContent: 'space-between' }}&gt;&#10;    &lt;Text style={{ fontSize: 15, color: '#B9CDF0', letterSpacing: 1 }}&gt;ISAD · INFORMATION SYSTEMS ANALYSIS &amp;amp; DESIGN&lt;/Text&gt;&#10;    &lt;Text style={{ fontSize: 15, color: '#B9CDF0' }}&gt;W04 · REQUIREMENTS&lt;/Text&gt;&#10;  &lt;/Box&gt;&#10;  &lt;Box style={{ padding: '12px 40px 0 40px', flexDirection: 'row', alignItems: 'center', justifyContent: 'space-between' }}&gt;&#10;    &lt;Text style={{ fontSize: 30, fontWeight: 'bold', color: '#0E3F8C' }}&gt;FURPS+ at a Glance&lt;/Text&gt;&#10;    &lt;Text style={{ fontSize: 14, color: '#1E4FA8', fontWeight: 'bold' }}&gt;06 / 38&lt;/Text&gt;&#10;  &lt;/Box&gt;&#10;  &lt;Box style={{ flex: 1, padding: '4px 40px 0 40px', justifyContent: 'center', alignItems: 'center' }}&gt;&#10;    &lt;svg width={1180} height={382} viewBox='0 0 1180 382'&gt;&#10;      &lt;text x='10' y='16' fill='#8B97A8' fontSize='13'&gt;FURPS — five lenses for non-functional and functional requirements&lt;/text&gt;&#10;&#10;      &lt;g transform='translate(10,30)'&gt;&#10;        &lt;rect x='0' y='0' width='220' height='156' rx='8' fill='#F0F5FC' stroke='#1E4FA8' strokeWidth='2' /&gt;&#10;        &lt;circle cx='25' cy='26' r='14' fill='#1E4FA8' /&gt;&#10;        &lt;text x='25' y='32' textAnchor='middle' fill='#FFFFFF' fontSize='15' fontWeight='bold'&gt;F&lt;/text&gt;&#10;        &lt;text x='48' y='31' fill='#0E3F8C' fontSize='15' fontWeight='bold'&gt;Functionality&lt;/text&gt;&#10;        &lt;text x='14' y='60' fill='#4A5568' fontSize='12'&gt;Features, capabilities,&lt;/text&gt;&#10;        &lt;text x='14' y='78' fill='#4A5568' fontSize='12'&gt;and security.&lt;/text&gt;&#10;        &lt;line x1='14' y1='92' x2='206' y2='92' stroke='#D6DCE5' strokeWidth='1' /&gt;&#10;        &lt;text x='14' y='112' fill='#1E4FA8' fontSize='11.5' fontWeight='bold'&gt;CampusBites:&lt;/text&gt;&#10;        &lt;text x='14' y='130' fill='#1E4FA8' fontSize='11.5'&gt;place an order, pay,&lt;/text&gt;&#10;        &lt;text x='14' y='146' fill='#1E4FA8' fontSize='11.5'&gt;track it, rate the rider&lt;/text&gt;&#10;      &lt;/g&gt;&#10;&#10;      &lt;g transform='translate(242,30)'&gt;&#10;        &lt;rect x='0' y='0' width='220' height='156' rx='8' fill='#F0F5FC' stroke='#1E4FA8' strokeWidth='2' /&gt;&#10;        &lt;circle cx='25' cy='26' r='14' fill='#1E4FA8' /&gt;&#10;        &lt;text x='25' y='32' textAnchor='middle' fill='#FFFFFF' fontSize='15' fontWeight='bold'&gt;U&lt;/text&gt;&#10;        &lt;text x='48' y='31' fill='#0E3F8C' fontSize='15' fontWeight='bold'&gt;Usability&lt;/text&gt;&#10;        &lt;text x='14' y='60' fill='#4A5568' fontSize='12'&gt;Learnability, efficiency,&lt;/text&gt;&#10;        &lt;text x='14' y='78' fill='#4A5568' fontSize='12'&gt;error handling.&lt;/text&gt;&#10;        &lt;line x1='14' y1='92' x2='206' y2='92' stroke='#D6DCE5' strokeWidth='1' /&gt;&#10;        &lt;text x='14' y='112' fill='#1E4FA8' fontSize='11.5' fontWeight='bold'&gt;CampusBites:&lt;/text&gt;&#10;        &lt;text x='14' y='130' fill='#1E4FA8' fontSize='11.5'&gt;a first-time user orders&lt;/text&gt;&#10;        &lt;text x='14' y='146' fill='#1E4FA8' fontSize='11.5'&gt;in under 90 seconds&lt;/text&gt;&#10;      &lt;/g&gt;&#10;&#10;      &lt;g transform='translate(474,30)'&gt;&#10;        &lt;rect x='0' y='0' width='220' height='156' rx='8' fill='#F0F5FC' stroke='#1E4FA8' strokeWidth='2' /&gt;&#10;        &lt;circle cx='25' cy='26' r='14' fill='#1E4FA8' /&gt;&#10;        &lt;text x='25' y='32' textAnchor='middle' fill='#FFFFFF' fontSize='15' fontWeight='bold'&gt;R&lt;/text&gt;&#10;        &lt;text x='48' y='31' fill='#0E3F8C' fontSize='15' fontWeight='bold'&gt;Reliability&lt;/text&gt;&#10;        &lt;text x='14' y='60' fill='#4A5568' fontSize='12'&gt;Availability, fault&lt;/text&gt;&#10;        &lt;text x='14' y='78' fill='#4A5568' fontSize='12'&gt;tolerance, recovery.&lt;/text&gt;&#10;        &lt;line x1='14' y1='92' x2='206' y2='92' stroke='#D6DCE5' strokeWidth='1' /&gt;&#10;        &lt;text x='14' y='112' fill='#1E4FA8' fontSize='11.5' fontWeight='bold'&gt;CampusBites:&lt;/text&gt;&#10;        &lt;text x='14' y='130' fill='#1E4FA8' fontSize='11.5'&gt;99.5% available during&lt;/text&gt;&#10;        &lt;text x='14' y='146' fill='#1E4FA8' fontSize='11.5'&gt;term; no lost orders&lt;/text&gt;&#10;      &lt;/g&gt;&#10;&#10;      &lt;g transform='translate(706,30)'&gt;&#10;        &lt;rect x='0' y='0' width='220' height='156' rx='8' fill='#F0F5FC' stroke='#1E4FA8' strokeWidth='2' /&gt;&#10;        &lt;circle cx='25' cy='26' r='14' fill='#1E4FA8' /&gt;&#10;        &lt;text x='25' y='32' textAnchor='middle' fill='#FFFFFF' fontSize='15' fontWeight='bold'&gt;P&lt;/text&gt;&#10;        &lt;text x='48' y='31' fill='#0E3F8C' fontSize='15' fontWeight='bold'&gt;Performance&lt;/text&gt;&#10;        &lt;text x='14' y='60' fill='#4A5568' fontSize='12'&gt;Throughput, response&lt;/text&gt;&#10;        &lt;text x='14' y='78' fill='#4A5568' fontSize='12'&gt;time, resource use.&lt;/text&gt;&#10;        &lt;line x1='14' y1='92' x2='206' y2='92' stroke='#D6DCE5' strokeWidth='1' /&gt;&#10;        &lt;text x='14' y='112' fill='#1E4FA8' fontSize='11.5' fontWeight='bold'&gt;CampusBites:&lt;/text&gt;&#10;        &lt;text x='14' y='130' fill='#1E4FA8' fontSize='11.5'&gt;5 000 students at the&lt;/text&gt;&#10;        &lt;text x='14' y='146' fill='#1E4FA8' fontSize='11.5'&gt;12:00 lunch peak&lt;/text&gt;&#10;      &lt;/g&gt;&#10;&#10;      &lt;g transform='translate(938,30)'&gt;&#10;        &lt;rect x='0' y='0' width='220' height='156' rx='8' fill='#F0F5FC' stroke='#1E4FA8' strokeWidth='2' /&gt;&#10;        &lt;circle cx='25' cy='26' r='14' fill='#1E4FA8' /&gt;&#10;        &lt;text x='25' y='32' textAnchor='middle' fill='#FFFFFF' fontSize='15' fontWeight='bold'&gt;S&lt;/text&gt;&#10;        &lt;text x='48' y='31' fill='#0E3F8C' fontSize='15' fontWeight='bold'&gt;Supportability&lt;/text&gt;&#10;        &lt;text x='14' y='60' fill='#4A5568' fontSize='12'&gt;Testability, changeability,&lt;/text&gt;&#10;        &lt;text x='14' y='78' fill='#4A5568' fontSize='12'&gt;configurability.&lt;/text&gt;&#10;        &lt;line x1='14' y1='92' x2='206' y2='92' stroke='#D6DCE5' strokeWidth='1' /&gt;&#10;        &lt;text x='14' y='112' fill='#1E4FA8' fontSize='11.5' fontWeight='bold'&gt;CampusBites:&lt;/text&gt;&#10;        &lt;text x='14' y='130' fill='#1E4FA8' fontSize='11.5'&gt;a new payment method&lt;/text&gt;&#10;        &lt;text x='14' y='146' fill='#1E4FA8' fontSize='11.5'&gt;added without a rewrite&lt;/text&gt;&#10;      &lt;/g&gt;&#10;&#10;      &lt;g transform='translate(10,204)'&gt;&#10;        &lt;rect x='0' y='0' width='1148' height='164' rx='8' fill='#FFFFFF' stroke='#D6DCE5' strokeWidth='1' /&gt;&#10;        &lt;circle cx='34' cy='34' r='17' fill='#FFC107' /&gt;&#10;        &lt;text x='34' y='41' textAnchor='middle' fill='#1A2230' fontSize='17' fontWeight='bold'&gt;+&lt;/text&gt;&#10;        &lt;text x='60' y='39' fill='#0E3F8C' fontSize='16' fontWeight='bold'&gt;The “+” — constraints you did not choose&lt;/text&gt;&#10;        &lt;text x='60' y='58' fill='#8B97A8' fontSize='12'&gt;These are not wishes. They are the walls of the room you are building in.&lt;/text&gt;&#10;&#10;        &lt;g transform='translate(24,74)'&gt;&#10;          &lt;rect x='0' y='0' width='266' height='72' rx='6' fill='#F7F9FC' stroke='#E5E7EB' strokeWidth='1' /&gt;&#10;          &lt;text x='14' y='22' fill='#0E3F8C' fontSize='13' fontWeight='bold'&gt;Design constraints&lt;/text&gt;&#10;          &lt;text x='14' y='42' fill='#4A5568' fontSize='11.5'&gt;Must run on the campus&lt;/text&gt;&#10;          &lt;text x='14' y='58' fill='#4A5568' fontSize='11.5'&gt;network; Android and iOS.&lt;/text&gt;&#10;        &lt;/g&gt;&#10;        &lt;g transform='translate(302,74)'&gt;&#10;          &lt;rect x='0' y='0' width='266' height='72' rx='6' fill='#F7F9FC' stroke='#E5E7EB' strokeWidth='1' /&gt;&#10;          &lt;text x='14' y='22' fill='#0E3F8C' fontSize='13' fontWeight='bold'&gt;Implementation constraints&lt;/text&gt;&#10;          &lt;text x='14' y='42' fill='#4A5568' fontSize='11.5'&gt;Java 21, Spring Boot,&lt;/text&gt;&#10;          &lt;text x='14' y='58' fill='#4A5568' fontSize='11.5'&gt;Git and GitHub for delivery.&lt;/text&gt;&#10;        &lt;/g&gt;&#10;        &lt;g transform='translate(580,74)'&gt;&#10;          &lt;rect x='0' y='0' width='266' height='72' rx='6' fill='#F7F9FC' stroke='#E5E7EB' strokeWidth='1' /&gt;&#10;          &lt;text x='14' y='22' fill='#0E3F8C' fontSize='13' fontWeight='bold'&gt;Interface constraints&lt;/text&gt;&#10;          &lt;text x='14' y='42' fill='#4A5568' fontSize='11.5'&gt;Campus card centre legacy&lt;/text&gt;&#10;          &lt;text x='14' y='58' fill='#4A5568' fontSize='11.5'&gt;API; external SMS gateway.&lt;/text&gt;&#10;        &lt;/g&gt;&#10;        &lt;g transform='translate(858,74)'&gt;&#10;          &lt;rect x='0' y='0' width='266' height='72' rx='6' fill='#F7F9FC' stroke='#E5E7EB' strokeWidth='1' /&gt;&#10;          &lt;text x='14' y='22' fill='#0E3F8C' fontSize='13' fontWeight='bold'&gt;Physical constraints&lt;/text&gt;&#10;          &lt;text x='14' y='42' fill='#4A5568' fontSize='11.5'&gt;Phones in a courier’s pocket;&lt;/text&gt;&#10;          &lt;text x='14' y='58' fill='#4A5568' fontSize='11.5'&gt;kitchen tablets on the wall.&lt;/text&gt;&#10;        &lt;/g&gt;&#10;      &lt;/g&gt;&#10;    &lt;/svg&gt;&#10;  &lt;/Box&gt;&#10;  &lt;Box style={{ height: 34, padding: '0 40px', flexDirection: 'row', alignItems: 'center', justifyContent: 'space-between' }}&gt;&#10;    &lt;Text style={{ fontSize: 13, color: '#8B97A8' }}&gt;ISAD · Fall 2026 · FURPS+ is a checklist, not a procedure — use it to notice what you forgot&lt;/Text&gt;&#10;    &lt;Text style={{ fontSize: 14, color: '#1E4FA8', fontWeight: 'bold' }}&gt;06 / 38&lt;/Text&gt;&#10;  &lt;/Box&gt;&#10;&lt;/Slide&gt;"/>
+        <p:cNvPr id="819" name="" descr="&lt;Slide style={{ background: '#FFFFFF', padding: 0 }}&gt;&#10;  &lt;Box style={{ height: 72, background: '#1E4FA8', padding: '0 40px', flexDirection: 'row', alignItems: 'center', justifyContent: 'space-between' }}&gt;&#10;    &lt;Text style={{ fontSize: 15, color: '#B9CDF0', letterSpacing: 1 }}&gt;ISAD · INFORMATION SYSTEMS ANALYSIS &amp;amp; DESIGN&lt;/Text&gt;&#10;    &lt;Text style={{ fontSize: 15, color: '#B9CDF0' }}&gt;W04 · REQUIREMENTS&lt;/Text&gt;&#10;  &lt;/Box&gt;&#10;  &lt;Box style={{ padding: '12px 40px 0 40px', flexDirection: 'row', alignItems: 'center', justifyContent: 'space-between' }}&gt;&#10;    &lt;Text style={{ fontSize: 30, fontWeight: 'bold', color: '#0E3F8C' }}&gt;FURPS+ at a Glance&lt;/Text&gt;&#10;    &lt;Text style={{ fontSize: 14, color: '#1E4FA8', fontWeight: 'bold' }}&gt;06 / 38&lt;/Text&gt;&#10;  &lt;/Box&gt;&#10;  &lt;Box style={{ flex: 1, padding: '4px 40px 0 40px', justifyContent: 'center', alignItems: 'center' }}&gt;&#10;    &lt;svg width={1180} height={382} viewBox='0 0 1180 382'&gt;&#10;      &lt;text x='10' y='16' fill='#8B97A8' fontSize='13'&gt;FURPS — five lenses for non-functional and functional requirements&lt;/text&gt;&#10;&#10;      &lt;g transform='translate(10,30)'&gt;&#10;        &lt;rect x='0' y='0' width='220' height='156' rx='8' fill='#F0F5FC' stroke='#1E4FA8' strokeWidth='2' /&gt;&#10;        &lt;circle cx='25' cy='26' r='14' fill='#1E4FA8' /&gt;&#10;        &lt;text x='25' y='32' textAnchor='middle' fill='#FFFFFF' fontSize='15' fontWeight='bold'&gt;F&lt;/text&gt;&#10;        &lt;text x='48' y='31' fill='#0E3F8C' fontSize='15' fontWeight='bold'&gt;Functionality&lt;/text&gt;&#10;        &lt;text x='14' y='60' fill='#4A5568' fontSize='12'&gt;Features, capabilities,&lt;/text&gt;&#10;        &lt;text x='14' y='78' fill='#4A5568' fontSize='12'&gt;and security.&lt;/text&gt;&#10;        &lt;line x1='14' y1='92' x2='206' y2='92' stroke='#D6DCE5' strokeWidth='1' /&gt;&#10;        &lt;text x='14' y='112' fill='#1E4FA8' fontSize='11.5' fontWeight='bold'&gt;CampusBites:&lt;/text&gt;&#10;        &lt;text x='14' y='130' fill='#1E4FA8' fontSize='11.5'&gt;place an order, pay,&lt;/text&gt;&#10;        &lt;text x='14' y='146' fill='#1E4FA8' fontSize='11.5'&gt;track it, rate the rider&lt;/text&gt;&#10;      &lt;/g&gt;&#10;&#10;      &lt;g transform='translate(242,30)'&gt;&#10;        &lt;rect x='0' y='0' width='220' height='156' rx='8' fill='#F0F5FC' stroke='#1E4FA8' strokeWidth='2' /&gt;&#10;        &lt;circle cx='25' cy='26' r='14' fill='#1E4FA8' /&gt;&#10;        &lt;text x='25' y='32' textAnchor='middle' fill='#FFFFFF' fontSize='15' fontWeight='bold'&gt;U&lt;/text&gt;&#10;        &lt;text x='48' y='31' fill='#0E3F8C' fontSize='15' fontWeight='bold'&gt;Usability&lt;/text&gt;&#10;        &lt;text x='14' y='60' fill='#4A5568' fontSize='12'&gt;Learnability, efficiency,&lt;/text&gt;&#10;        &lt;text x='14' y='78' fill='#4A5568' fontSize='12'&gt;error handling.&lt;/text&gt;&#10;        &lt;line x1='14' y1='92' x2='206' y2='92' stroke='#D6DCE5' strokeWidth='1' /&gt;&#10;        &lt;text x='14' y='112' fill='#1E4FA8' fontSize='11.5' fontWeight='bold'&gt;CampusBites:&lt;/text&gt;&#10;        &lt;text x='14' y='130' fill='#1E4FA8' fontSize='11.5'&gt;a first-time user orders&lt;/text&gt;&#10;        &lt;text x='14' y='146' fill='#1E4FA8' fontSize='11.5'&gt;in under 90 seconds&lt;/text&gt;&#10;      &lt;/g&gt;&#10;&#10;      &lt;g transform='translate(474,30)'&gt;&#10;        &lt;rect x='0' y='0' width='220' height='156' rx='8' fill='#F0F5FC' stroke='#1E4FA8' strokeWidth='2' /&gt;&#10;        &lt;circle cx='25' cy='26' r='14' fill='#1E4FA8' /&gt;&#10;        &lt;text x='25' y='32' textAnchor='middle' fill='#FFFFFF' fontSize='15' fontWeight='bold'&gt;R&lt;/text&gt;&#10;        &lt;text x='48' y='31' fill='#0E3F8C' fontSize='15' fontWeight='bold'&gt;Reliability&lt;/text&gt;&#10;        &lt;text x='14' y='60' fill='#4A5568' fontSize='12'&gt;Availability, fault&lt;/text&gt;&#10;        &lt;text x='14' y='78' fill='#4A5568' fontSize='12'&gt;tolerance, recovery.&lt;/text&gt;&#10;        &lt;line x1='14' y1='92' x2='206' y2='92' stroke='#D6DCE5' strokeWidth='1' /&gt;&#10;        &lt;text x='14' y='112' fill='#1E4FA8' fontSize='11.5' fontWeight='bold'&gt;CampusBites:&lt;/text&gt;&#10;        &lt;text x='14' y='130' fill='#1E4FA8' fontSize='11.5'&gt;99.5% available during&lt;/text&gt;&#10;        &lt;text x='14' y='146' fill='#1E4FA8' fontSize='11.5'&gt;term; no lost orders&lt;/text&gt;&#10;      &lt;/g&gt;&#10;&#10;      &lt;g transform='translate(706,30)'&gt;&#10;        &lt;rect x='0' y='0' width='220' height='156' rx='8' fill='#F0F5FC' stroke='#1E4FA8' strokeWidth='2' /&gt;&#10;        &lt;circle cx='25' cy='26' r='14' fill='#1E4FA8' /&gt;&#10;        &lt;text x='25' y='32' textAnchor='middle' fill='#FFFFFF' fontSize='15' fontWeight='bold'&gt;P&lt;/text&gt;&#10;        &lt;text x='48' y='31' fill='#0E3F8C' fontSize='15' fontWeight='bold'&gt;Performance&lt;/text&gt;&#10;        &lt;text x='14' y='60' fill='#4A5568' fontSize='12'&gt;Throughput, response&lt;/text&gt;&#10;        &lt;text x='14' y='78' fill='#4A5568' fontSize='12'&gt;time, resource use.&lt;/text&gt;&#10;        &lt;line x1='14' y1='92' x2='206' y2='92' stroke='#D6DCE5' strokeWidth='1' /&gt;&#10;        &lt;text x='14' y='112' fill='#1E4FA8' fontSize='11.5' fontWeight='bold'&gt;CampusBites:&lt;/text&gt;&#10;        &lt;text x='14' y='130' fill='#1E4FA8' fontSize='11.5'&gt;5 000 students at the&lt;/text&gt;&#10;        &lt;text x='14' y='146' fill='#1E4FA8' fontSize='11.5'&gt;12:00 lunch peak&lt;/text&gt;&#10;      &lt;/g&gt;&#10;&#10;      &lt;g transform='translate(938,30)'&gt;&#10;        &lt;rect x='0' y='0' width='220' height='156' rx='8' fill='#F0F5FC' stroke='#1E4FA8' strokeWidth='2' /&gt;&#10;        &lt;circle cx='25' cy='26' r='14' fill='#1E4FA8' /&gt;&#10;        &lt;text x='25' y='32' textAnchor='middle' fill='#FFFFFF' fontSize='15' fontWeight='bold'&gt;S&lt;/text&gt;&#10;        &lt;text x='48' y='31' fill='#0E3F8C' fontSize='15' fontWeight='bold'&gt;Supportability&lt;/text&gt;&#10;        &lt;text x='14' y='60' fill='#4A5568' fontSize='12'&gt;Testability, changeability,&lt;/text&gt;&#10;        &lt;text x='14' y='78' fill='#4A5568' fontSize='12'&gt;configurability.&lt;/text&gt;&#10;        &lt;line x1='14' y1='92' x2='206' y2='92' stroke='#D6DCE5' strokeWidth='1' /&gt;&#10;        &lt;text x='14' y='112' fill='#1E4FA8' fontSize='11.5' fontWeight='bold'&gt;CampusBites:&lt;/text&gt;&#10;        &lt;text x='14' y='130' fill='#1E4FA8' fontSize='11.5'&gt;a new payment method&lt;/text&gt;&#10;        &lt;text x='14' y='146' fill='#1E4FA8' fontSize='11.5'&gt;added without a rewrite&lt;/text&gt;&#10;      &lt;/g&gt;&#10;&#10;      &lt;g transform='translate(10,204)'&gt;&#10;        &lt;rect x='0' y='0' width='1148' height='164' rx='8' fill='#FFFFFF' stroke='#D6DCE5' strokeWidth='1' /&gt;&#10;        &lt;circle cx='34' cy='34' r='17' fill='#FFC107' /&gt;&#10;        &lt;text x='34' y='41' textAnchor='middle' fill='#1A2230' fontSize='17' fontWeight='bold'&gt;+&lt;/text&gt;&#10;        &lt;text x='60' y='39' fill='#0E3F8C' fontSize='16' fontWeight='bold'&gt;The “+” — constraints you did not choose&lt;/text&gt;&#10;        &lt;text x='60' y='58' fill='#8B97A8' fontSize='12'&gt;These are not wishes. They are the walls of the room you are building in.&lt;/text&gt;&#10;&#10;        &lt;g transform='translate(24,74)'&gt;&#10;          &lt;rect x='0' y='0' width='266' height='72' rx='6' fill='#F7F9FC' stroke='#E5E7EB' strokeWidth='1' /&gt;&#10;          &lt;text x='14' y='22' fill='#0E3F8C' fontSize='13' fontWeight='bold'&gt;Design constraints&lt;/text&gt;&#10;          &lt;text x='14' y='42' fill='#4A5568' fontSize='11.5'&gt;Must run on the campus&lt;/text&gt;&#10;          &lt;text x='14' y='58' fill='#4A5568' fontSize='11.5'&gt;network; Android and iOS.&lt;/text&gt;&#10;        &lt;/g&gt;&#10;        &lt;g transform='translate(302,74)'&gt;&#10;          &lt;rect x='0' y='0' width='266' height='72' rx='6' fill='#F7F9FC' stroke='#E5E7EB' strokeWidth='1' /&gt;&#10;          &lt;text x='14' y='22' fill='#0E3F8C' fontSize='13' fontWeight='bold'&gt;Implementation constraints&lt;/text&gt;&#10;          &lt;text x='14' y='42' fill='#4A5568' fontSize='11.5'&gt;Web app on campus servers;&lt;/text&gt;&#10;          &lt;text x='14' y='58' fill='#4A5568' fontSize='11.5'&gt;Git and GitHub for delivery.&lt;/text&gt;&#10;        &lt;/g&gt;&#10;        &lt;g transform='translate(580,74)'&gt;&#10;          &lt;rect x='0' y='0' width='266' height='72' rx='6' fill='#F7F9FC' stroke='#E5E7EB' strokeWidth='1' /&gt;&#10;          &lt;text x='14' y='22' fill='#0E3F8C' fontSize='13' fontWeight='bold'&gt;Interface constraints&lt;/text&gt;&#10;          &lt;text x='14' y='42' fill='#4A5568' fontSize='11.5'&gt;Campus card centre legacy&lt;/text&gt;&#10;          &lt;text x='14' y='58' fill='#4A5568' fontSize='11.5'&gt;API; external SMS gateway.&lt;/text&gt;&#10;        &lt;/g&gt;&#10;        &lt;g transform='translate(858,74)'&gt;&#10;          &lt;rect x='0' y='0' width='266' height='72' rx='6' fill='#F7F9FC' stroke='#E5E7EB' strokeWidth='1' /&gt;&#10;          &lt;text x='14' y='22' fill='#0E3F8C' fontSize='13' fontWeight='bold'&gt;Physical constraints&lt;/text&gt;&#10;          &lt;text x='14' y='42' fill='#4A5568' fontSize='11.5'&gt;Phones in a courier’s pocket;&lt;/text&gt;&#10;          &lt;text x='14' y='58' fill='#4A5568' fontSize='11.5'&gt;kitchen tablets on the wall.&lt;/text&gt;&#10;        &lt;/g&gt;&#10;      &lt;/g&gt;&#10;    &lt;/svg&gt;&#10;  &lt;/Box&gt;&#10;  &lt;Box style={{ height: 34, padding: '0 40px', flexDirection: 'row', alignItems: 'center', justifyContent: 'space-between' }}&gt;&#10;    &lt;Text style={{ fontSize: 13, color: '#8B97A8' }}&gt;ISAD · Fall 2026 · FURPS+ is a checklist, not a procedure — use it to notice what you forgot&lt;/Text&gt;&#10;    &lt;Text style={{ fontSize: 14, color: '#1E4FA8', fontWeight: 'bold' }}&gt;06 / 38&lt;/Text&gt;&#10;  &lt;/Box&gt;&#10;&lt;/Slide&gt;"/>
         <p:cNvGrpSpPr/>
         <p:nvPr/>
       </p:nvGrpSpPr>

--- a/01-slides/W04-Requirements-and-Use-Case-Modeling.pptx
+++ b/01-slides/W04-Requirements-and-Use-Case-Modeling.pptx
@@ -21643,7 +21643,7 @@
   <p:cSld>
     <p:spTree>
       <p:nvGrpSpPr>
-        <p:cNvPr id="519" name="" descr="&lt;Slide style={{ background: '#FFFFFF', padding: 0 }}&gt;&#10;  &lt;Box style={{ height: 72, background: '#1E4FA8', padding: '0 40px', flexDirection: 'row', alignItems: 'center', justifyContent: 'space-between' }}&gt;&#10;    &lt;Text style={{ fontSize: 15, color: '#B9CDF0', letterSpacing: 1 }}&gt;ISAD · INFORMATION SYSTEMS ANALYSIS &amp;amp; DESIGN&lt;/Text&gt;&#10;    &lt;Text style={{ fontSize: 15, color: '#B9CDF0' }}&gt;W04 · FINDING USE CASES&lt;/Text&gt;&#10;  &lt;/Box&gt;&#10;  &lt;Box style={{ padding: '14px 40px 0 40px', flexDirection: 'row', alignItems: 'center', justifyContent: 'space-between' }}&gt;&#10;    &lt;Text style={{ fontSize: 29, fontWeight: 'bold', color: '#0E3F8C' }}&gt;What We Have Not Done Yet&lt;/Text&gt;&#10;    &lt;Text style={{ fontSize: 14, color: '#1E4FA8', fontWeight: 'bold' }}&gt;29 / 38&lt;/Text&gt;&#10;  &lt;/Box&gt;&#10;  &lt;Box style={{ flex: 1, padding: '16px 60px 0 60px', flexDirection: 'column', justifyContent: 'center', alignItems: 'center' }}&gt;&#10;    &lt;Box style={{ width: 960, padding: '20px 30px', background: '#FFF6E0', borderRadius: 10, borderLeft: '6px solid #FFC107', marginBottom: 20 }}&gt;&#10;      &lt;Text style={{ fontSize: 23, color: '#0E3F8C', fontWeight: 'bold', lineHeight: 1.4, textAlign: 'center' }}&gt;&#10;        A named ellipse is a promise to write something.&#10;        &lt;br /&gt;&#10;        The promise is kept next week.&#10;      &lt;/Text&gt;&#10;    &lt;/Box&gt;&#10;    &lt;Box style={{ width: 960, flexDirection: 'row', gap: 18 }}&gt;&#10;      &lt;Box style={{ flex: 1, padding: '20px 18px', background: '#FFFFFF', borderRadius: 10, border: '1px solid #D6DCE5' }}&gt;&#10;        &lt;Box style={{ flexDirection: 'row', alignItems: 'center', gap: 8, marginBottom: 8 }}&gt;&#10;          &lt;FAIcon name='info-circle' style={{ fill: '#1E4FA8', width: 20, height: 20 }} /&gt;&#10;          &lt;Text style={{ fontSize: 16, fontWeight: 'bold', color: '#0E3F8C' }}&gt;Not yet: the use case text&lt;/Text&gt;&#10;        &lt;/Box&gt;&#10;        &lt;Text style={{ fontSize: 12.8, color: '#4A5568', lineHeight: 1.65 }}&gt;&#10;          “Place Order” on a diagram tells you a goal exists. It does not tell you what happens when the card is declined, or what must be true before the student starts. That is the use case specification — &lt;Text style={{ fontWeight: 'bold', color: '#0E3F8C' }}&gt;Week 05&lt;/Text&gt;.&#10;        &lt;/Text&gt;&#10;      &lt;/Box&gt;&#10;      &lt;Box style={{ flex: 1, padding: '20px 18px', background: '#FFFFFF', borderRadius: 10, border: '1px solid #D6DCE5' }}&gt;&#10;        &lt;Box style={{ flexDirection: 'row', alignItems: 'center', gap: 8, marginBottom: 8 }}&gt;&#10;          &lt;FAIcon name='layer-group' style={{ fill: '#1E4FA8', width: 20, height: 20 }} /&gt;&#10;          &lt;Text style={{ fontSize: 16, fontWeight: 'bold', color: '#0E3F8C' }}&gt;Not yet: the domain model&lt;/Text&gt;&#10;        &lt;/Box&gt;&#10;        &lt;Text style={{ fontSize: 12.8, color: '#4A5568', lineHeight: 1.65 }}&gt;&#10;          Order, MenuItem and Courier are names on this page. Turning them into classes with attributes and associations is a different artefact — &lt;Text style={{ fontWeight: 'bold', color: '#0E3F8C' }}&gt;Week 06&lt;/Text&gt;. Resist the urge to draw boxes today.&#10;        &lt;/Text&gt;&#10;      &lt;/Box&gt;&#10;      &lt;Box style={{ flex: 1, padding: '20px 18px', background: '#F0F5FC', borderRadius: 10, border: '1px solid #1E4FA8' }}&gt;&#10;        &lt;Box style={{ flexDirection: 'row', alignItems: 'center', gap: 8, marginBottom: 8 }}&gt;&#10;          &lt;FAIcon name='handshake' style={{ fill: '#1E4FA8', width: 20, height: 20 }} /&gt;&#10;          &lt;Text style={{ fontSize: 16, fontWeight: 'bold', color: '#0E3F8C' }}&gt;Next week: you are the client&lt;/Text&gt;&#10;        &lt;/Box&gt;&#10;        &lt;Text style={{ fontSize: 12.8, color: '#4A5568', lineHeight: 1.65 }}&gt;&#10;          In Week 05 the instructor plays the client and reviews your pack with you. Bring a diagram you can defend, because the other team will ask why “Manage Order” is on it.&#10;        &lt;/Text&gt;&#10;      &lt;/Box&gt;&#10;    &lt;/Box&gt;&#10;  &lt;/Box&gt;&#10;  &lt;Box style={{ height: 46, background: '#0E3F8C', padding: '0 40px', flexDirection: 'row', alignItems: 'center', justifyContent: 'center' }}&gt;&#10;    &lt;Text style={{ fontSize: 16, color: '#FFFFFF', fontWeight: '600' }}&gt;This week you find the goals. Next week you write them down so a stranger could build them.&lt;/Text&gt;&#10;  &lt;/Box&gt;&#10;&lt;/Slide&gt;"/>
+        <p:cNvPr id="519" name="" descr="&lt;Slide style={{ background: '#FFFFFF', padding: 0 }}&gt;&#10;  &lt;Box style={{ height: 72, background: '#1E4FA8', padding: '0 40px', flexDirection: 'row', alignItems: 'center', justifyContent: 'space-between' }}&gt;&#10;    &lt;Text style={{ fontSize: 15, color: '#B9CDF0', letterSpacing: 1 }}&gt;ISAD · INFORMATION SYSTEMS ANALYSIS &amp;amp; DESIGN&lt;/Text&gt;&#10;    &lt;Text style={{ fontSize: 15, color: '#B9CDF0' }}&gt;W04 · FINDING USE CASES&lt;/Text&gt;&#10;  &lt;/Box&gt;&#10;  &lt;Box style={{ padding: '14px 40px 0 40px', flexDirection: 'row', alignItems: 'center', justifyContent: 'space-between' }}&gt;&#10;    &lt;Text style={{ fontSize: 29, fontWeight: 'bold', color: '#0E3F8C' }}&gt;What We Have Not Done Yet&lt;/Text&gt;&#10;    &lt;Text style={{ fontSize: 14, color: '#1E4FA8', fontWeight: 'bold' }}&gt;29 / 38&lt;/Text&gt;&#10;  &lt;/Box&gt;&#10;  &lt;Box style={{ flex: 1, padding: '16px 60px 0 60px', flexDirection: 'column', justifyContent: 'center', alignItems: 'center' }}&gt;&#10;    &lt;Box style={{ width: 960, padding: '20px 30px', background: '#FFF6E0', borderRadius: 10, borderLeft: '6px solid #FFC107', marginBottom: 20 }}&gt;&#10;      &lt;Text style={{ fontSize: 23, color: '#0E3F8C', fontWeight: 'bold', lineHeight: 1.4, textAlign: 'center' }}&gt;&#10;        A named ellipse is a promise to write something.&#10;        &lt;br /&gt;&#10;        The promise is kept next week.&#10;      &lt;/Text&gt;&#10;    &lt;/Box&gt;&#10;    &lt;Box style={{ width: 960, flexDirection: 'row', gap: 18 }}&gt;&#10;      &lt;Box style={{ flex: 1, padding: '20px 18px', background: '#FFFFFF', borderRadius: 10, border: '1px solid #D6DCE5' }}&gt;&#10;        &lt;Box style={{ flexDirection: 'row', alignItems: 'center', gap: 8, marginBottom: 8 }}&gt;&#10;          &lt;FAIcon name='info-circle' style={{ fill: '#1E4FA8', width: 20, height: 20 }} /&gt;&#10;          &lt;Text style={{ fontSize: 16, fontWeight: 'bold', color: '#0E3F8C' }}&gt;Not yet: the use case text&lt;/Text&gt;&#10;        &lt;/Box&gt;&#10;        &lt;Text style={{ fontSize: 12.8, color: '#4A5568', lineHeight: 1.65 }}&gt;&#10;          “Place Order” on a diagram tells you a goal exists. It does not tell you what happens when the card is declined, or what must be true before the student starts. That is the use case specification — &lt;Text style={{ fontWeight: 'bold', color: '#0E3F8C' }}&gt;Week 05&lt;/Text&gt;.&#10;        &lt;/Text&gt;&#10;      &lt;/Box&gt;&#10;      &lt;Box style={{ flex: 1, padding: '20px 18px', background: '#FFFFFF', borderRadius: 10, border: '1px solid #D6DCE5' }}&gt;&#10;        &lt;Box style={{ flexDirection: 'row', alignItems: 'center', gap: 8, marginBottom: 8 }}&gt;&#10;          &lt;FAIcon name='layer-group' style={{ fill: '#1E4FA8', width: 20, height: 20 }} /&gt;&#10;          &lt;Text style={{ fontSize: 16, fontWeight: 'bold', color: '#0E3F8C' }}&gt;Not yet: the domain model&lt;/Text&gt;&#10;        &lt;/Box&gt;&#10;        &lt;Text style={{ fontSize: 12.8, color: '#4A5568', lineHeight: 1.65 }}&gt;&#10;          Order, MenuItem and Courier are names on this page. Turning them into classes with attributes and associations is a different artefact — &lt;Text style={{ fontWeight: 'bold', color: '#0E3F8C' }}&gt;Week 06&lt;/Text&gt;. Resist the urge to draw boxes today.&#10;        &lt;/Text&gt;&#10;      &lt;/Box&gt;&#10;      &lt;Box style={{ flex: 1, padding: '20px 18px', background: '#F0F5FC', borderRadius: 10, border: '1px solid #1E4FA8' }}&gt;&#10;        &lt;Box style={{ flexDirection: 'row', alignItems: 'center', gap: 8, marginBottom: 8 }}&gt;&#10;          &lt;FAIcon name='handshake' style={{ fill: '#1E4FA8', width: 20, height: 20 }} /&gt;&#10;          &lt;Text style={{ fontSize: 16, fontWeight: 'bold', color: '#0E3F8C' }}&gt;Next week: you are the client&lt;/Text&gt;&#10;        &lt;/Box&gt;&#10;        &lt;Text style={{ fontSize: 12.8, color: '#4A5568', lineHeight: 1.65 }}&gt;&#10;          In Week 05 the instructor plays the client and reviews your pack with you. Bring a diagram you can defend, because the client will ask why “Manage Order” is on it.&#10;        &lt;/Text&gt;&#10;      &lt;/Box&gt;&#10;    &lt;/Box&gt;&#10;  &lt;/Box&gt;&#10;  &lt;Box style={{ height: 46, background: '#0E3F8C', padding: '0 40px', flexDirection: 'row', alignItems: 'center', justifyContent: 'center' }}&gt;&#10;    &lt;Text style={{ fontSize: 16, color: '#FFFFFF', fontWeight: '600' }}&gt;This week you find the goals. Next week you write them down so a stranger could build them.&lt;/Text&gt;&#10;  &lt;/Box&gt;&#10;&lt;/Slide&gt;"/>
         <p:cNvGrpSpPr/>
         <p:nvPr/>
       </p:nvGrpSpPr>
@@ -22415,7 +22415,7 @@
                 <a:latin typeface="Microsoft YaHei"/>
                 <a:ea typeface="Microsoft YaHei"/>
               </a:rPr>
-              <a:t>In Week 05 the instructor plays the client and reviews your pack with you. Bring a diagram you can defend, because the other team will ask why “Manage Order” is on it.</a:t>
+              <a:t>In Week 05 the instructor plays the client and reviews your pack with you. Bring a diagram you can defend, because the client will ask why “Manage Order” is on it.</a:t>
             </a:r>
             <a:endParaRPr/>
           </a:p>
@@ -24410,7 +24410,7 @@
   <p:cSld>
     <p:spTree>
       <p:nvGrpSpPr>
-        <p:cNvPr id="592" name="" descr="&lt;Slide style={{ background: '#FFFFFF', padding: 0 }}&gt;&#10;  &lt;Box style={{ height: 72, background: '#1E4FA8', padding: '0 40px', flexDirection: 'row', alignItems: 'center', justifyContent: 'space-between' }}&gt;&#10;    &lt;Text style={{ fontSize: 15, color: '#B9CDF0', letterSpacing: 1 }}&gt;ISAD · INFORMATION SYSTEMS ANALYSIS &amp;amp; DESIGN&lt;/Text&gt;&#10;    &lt;Text style={{ fontSize: 15, color: '#B9CDF0' }}&gt;W04 · LAB · EXERCISE 4.1&lt;/Text&gt;&#10;  &lt;/Box&gt;&#10;  &lt;Box style={{ padding: '14px 40px 0 40px', flexDirection: 'row', alignItems: 'center', justifyContent: 'space-between' }}&gt;&#10;    &lt;Text style={{ fontSize: 29, fontWeight: 'bold', color: '#0E3F8C' }}&gt;Exercise 4.1 — Your Turn&lt;/Text&gt;&#10;    &lt;Text style={{ fontSize: 14, color: '#1E4FA8', fontWeight: 'bold' }}&gt;32 / 38&lt;/Text&gt;&#10;  &lt;/Box&gt;&#10;  &lt;Box style={{ flex: 1, padding: '14px 40px 0 40px', flexDirection: 'row', gap: 24 }}&gt;&#10;    &lt;Box style={{ flex: 1, flexDirection: 'column', gap: 12 }}&gt;&#10;      &lt;Box style={{ padding: '18px 18px', background: '#F0F5FC', borderRadius: 10, borderLeft: '4px solid #1E4FA8' }}&gt;&#10;        &lt;Text style={{ fontSize: 16, fontWeight: 'bold', color: '#0E3F8C' }}&gt;A · List the actors&lt;/Text&gt;&#10;        &lt;Text style={{ fontSize: 13, color: '#4A5568', lineHeight: 1.6, marginTop: 6 }}&gt;&#10;          Every role that stands outside CampusBites and talks to it. Name roles, not people — and include the systems that serve you.&#10;        &lt;/Text&gt;&#10;        &lt;Text style={{ fontSize: 12.5, color: '#8B97A8', marginTop: 8 }}&gt;Target: five to seven.&lt;/Text&gt;&#10;      &lt;/Box&gt;&#10;      &lt;Box style={{ padding: '18px 18px', background: '#F0F5FC', borderRadius: 10, borderLeft: '4px solid #1E4FA8' }}&gt;&#10;        &lt;Text style={{ fontSize: 16, fontWeight: 'bold', color: '#0E3F8C' }}&gt;B · List candidate use cases&lt;/Text&gt;&#10;        &lt;Text style={{ fontSize: 13, color: '#4A5568', lineHeight: 1.6, marginTop: 6 }}&gt;&#10;          Take the verbs from the narrative and keep only those that name a goal somebody has. Write them verb plus object.&#10;        &lt;/Text&gt;&#10;        &lt;Text style={{ fontSize: 12.5, color: '#8B97A8', marginTop: 8 }}&gt;Target: nine candidates before filtering.&lt;/Text&gt;&#10;      &lt;/Box&gt;&#10;    &lt;/Box&gt;&#10;    &lt;Box style={{ flex: 1, flexDirection: 'column', gap: 12 }}&gt;&#10;      &lt;Box style={{ padding: '18px 18px', background: '#FFFFFF', borderRadius: 10, border: '1px solid #D6DCE5' }}&gt;&#10;        &lt;Text style={{ fontSize: 16, fontWeight: 'bold', color: '#0E3F8C' }}&gt;C · Mark primary and secondary&lt;/Text&gt;&#10;        &lt;Text style={{ fontSize: 13, color: '#4A5568', lineHeight: 1.6, marginTop: 6 }}&gt;&#10;          For each actor, say whether they start use cases (primary) or are called by the system (secondary). Write the goal they own.&#10;        &lt;/Text&gt;&#10;      &lt;/Box&gt;&#10;      &lt;Box style={{ padding: '18px 18px', background: '#FFFFFF', borderRadius: 10, border: '1px solid #D6DCE5' }}&gt;&#10;        &lt;Text style={{ fontSize: 16, fontWeight: 'bold', color: '#0E3F8C' }}&gt;D · Filter the candidates&lt;/Text&gt;&#10;        &lt;Text style={{ fontSize: 13, color: '#4A5568', lineHeight: 1.6, marginTop: 6 }}&gt;&#10;          For each of the nine, answer in one line: is this a user goal, or a step inside one? Keep the goals; park the steps.&#10;        &lt;/Text&gt;&#10;      &lt;/Box&gt;&#10;      &lt;Box style={{ padding: '16px 18px', background: '#FFF6E0', borderRadius: 9, border: '1px solid #FFC107' }}&gt;&#10;        &lt;Text style={{ fontSize: 13, color: '#4A5568', lineHeight: 1.6 }}&gt;&#10;          &lt;Text style={{ fontWeight: 'bold', color: '#996F00' }}&gt;Work in your team. &lt;/Text&gt;&#10;          One page, two columns, twenty-five minutes. Answers on the next two pages — do not turn the page early.&#10;        &lt;/Text&gt;&#10;      &lt;/Box&gt;&#10;    &lt;/Box&gt;&#10;  &lt;/Box&gt;&#10;  &lt;Box style={{ height: 46, background: '#0E3F8C', padding: '0 40px', flexDirection: 'row', alignItems: 'center', justifyContent: 'center' }}&gt;&#10;    &lt;Text style={{ fontSize: 16, color: '#FFFFFF', fontWeight: '600' }}&gt;Twenty-five minutes. One page per team. Then we compare — and you will disagree about at least two of them.&lt;/Text&gt;&#10;  &lt;/Box&gt;&#10;&lt;/Slide&gt;"/>
+        <p:cNvPr id="592" name="" descr="&lt;Slide style={{ background: '#FFFFFF', padding: 0 }}&gt;&#10;  &lt;Box style={{ height: 72, background: '#1E4FA8', padding: '0 40px', flexDirection: 'row', alignItems: 'center', justifyContent: 'space-between' }}&gt;&#10;    &lt;Text style={{ fontSize: 15, color: '#B9CDF0', letterSpacing: 1 }}&gt;ISAD · INFORMATION SYSTEMS ANALYSIS &amp;amp; DESIGN&lt;/Text&gt;&#10;    &lt;Text style={{ fontSize: 15, color: '#B9CDF0' }}&gt;W04 · LAB · EXERCISE 4.1&lt;/Text&gt;&#10;  &lt;/Box&gt;&#10;  &lt;Box style={{ padding: '14px 40px 0 40px', flexDirection: 'row', alignItems: 'center', justifyContent: 'space-between' }}&gt;&#10;    &lt;Text style={{ fontSize: 29, fontWeight: 'bold', color: '#0E3F8C' }}&gt;Exercise 4.1 — Your Turn&lt;/Text&gt;&#10;    &lt;Text style={{ fontSize: 14, color: '#1E4FA8', fontWeight: 'bold' }}&gt;32 / 38&lt;/Text&gt;&#10;  &lt;/Box&gt;&#10;  &lt;Box style={{ flex: 1, padding: '14px 40px 0 40px', flexDirection: 'row', gap: 24 }}&gt;&#10;    &lt;Box style={{ flex: 1, flexDirection: 'column', gap: 12 }}&gt;&#10;      &lt;Box style={{ padding: '18px 18px', background: '#F0F5FC', borderRadius: 10, borderLeft: '4px solid #1E4FA8' }}&gt;&#10;        &lt;Text style={{ fontSize: 16, fontWeight: 'bold', color: '#0E3F8C' }}&gt;A · List the actors&lt;/Text&gt;&#10;        &lt;Text style={{ fontSize: 13, color: '#4A5568', lineHeight: 1.6, marginTop: 6 }}&gt;&#10;          Every role that stands outside CampusBites and talks to it. Name roles, not people — and include the systems that serve you.&#10;        &lt;/Text&gt;&#10;        &lt;Text style={{ fontSize: 12.5, color: '#8B97A8', marginTop: 8 }}&gt;Target: five to seven.&lt;/Text&gt;&#10;      &lt;/Box&gt;&#10;      &lt;Box style={{ padding: '18px 18px', background: '#F0F5FC', borderRadius: 10, borderLeft: '4px solid #1E4FA8' }}&gt;&#10;        &lt;Text style={{ fontSize: 16, fontWeight: 'bold', color: '#0E3F8C' }}&gt;B · List candidate use cases&lt;/Text&gt;&#10;        &lt;Text style={{ fontSize: 13, color: '#4A5568', lineHeight: 1.6, marginTop: 6 }}&gt;&#10;          Take the verbs from the narrative and keep only those that name a goal somebody has. Write them verb plus object.&#10;        &lt;/Text&gt;&#10;        &lt;Text style={{ fontSize: 12.5, color: '#8B97A8', marginTop: 8 }}&gt;Target: nine candidates before filtering.&lt;/Text&gt;&#10;      &lt;/Box&gt;&#10;    &lt;/Box&gt;&#10;    &lt;Box style={{ flex: 1, flexDirection: 'column', gap: 12 }}&gt;&#10;      &lt;Box style={{ padding: '18px 18px', background: '#FFFFFF', borderRadius: 10, border: '1px solid #D6DCE5' }}&gt;&#10;        &lt;Text style={{ fontSize: 16, fontWeight: 'bold', color: '#0E3F8C' }}&gt;C · Mark primary and secondary&lt;/Text&gt;&#10;        &lt;Text style={{ fontSize: 13, color: '#4A5568', lineHeight: 1.6, marginTop: 6 }}&gt;&#10;          For each actor, say whether they start use cases (primary) or are called by the system (secondary). Write the goal they own.&#10;        &lt;/Text&gt;&#10;      &lt;/Box&gt;&#10;      &lt;Box style={{ padding: '18px 18px', background: '#FFFFFF', borderRadius: 10, border: '1px solid #D6DCE5' }}&gt;&#10;        &lt;Text style={{ fontSize: 16, fontWeight: 'bold', color: '#0E3F8C' }}&gt;D · Filter the candidates&lt;/Text&gt;&#10;        &lt;Text style={{ fontSize: 13, color: '#4A5568', lineHeight: 1.6, marginTop: 6 }}&gt;&#10;          For each of the nine, answer in one line: is this a user goal, or a step inside one? Keep the goals; park the steps.&#10;        &lt;/Text&gt;&#10;      &lt;/Box&gt;&#10;      &lt;Box style={{ padding: '16px 18px', background: '#FFF6E0', borderRadius: 9, border: '1px solid #FFC107' }}&gt;&#10;        &lt;Text style={{ fontSize: 13, color: '#4A5568', lineHeight: 1.6 }}&gt;&#10;          &lt;Text style={{ fontWeight: 'bold', color: '#996F00' }}&gt;Work in your team. &lt;/Text&gt;&#10;          One page, two columns, twenty-five minutes. Answers on the next two pages — do not turn the page early.&#10;        &lt;/Text&gt;&#10;      &lt;/Box&gt;&#10;    &lt;/Box&gt;&#10;  &lt;/Box&gt;&#10;  &lt;Box style={{ height: 46, background: '#0E3F8C', padding: '0 40px', flexDirection: 'row', alignItems: 'center', justifyContent: 'center' }}&gt;&#10;    &lt;Text style={{ fontSize: 16, color: '#FFFFFF', fontWeight: '600' }}&gt;Twenty-five minutes. One page for the four of you — then each person defends one row you disagreed on.&lt;/Text&gt;&#10;  &lt;/Box&gt;&#10;&lt;/Slide&gt;"/>
         <p:cNvGrpSpPr/>
         <p:nvPr/>
       </p:nvGrpSpPr>
@@ -25306,8 +25306,8 @@
         </p:nvSpPr>
         <p:spPr>
           <a:xfrm rot="0" flipH="0" flipV="0">
-            <a:off x="2085975" y="6543675"/>
-            <a:ext cx="8029575" cy="190500"/>
+            <a:off x="2257425" y="6543675"/>
+            <a:ext cx="7686675" cy="190500"/>
           </a:xfrm>
           <a:prstGeom prst="rect"/>
         </p:spPr>
@@ -25327,7 +25327,7 @@
                 <a:latin typeface="Microsoft YaHei"/>
                 <a:ea typeface="Microsoft YaHei"/>
               </a:rPr>
-              <a:t>Twenty-five minutes. One page per team. Then we compare — and you will disagree about at least two of them.</a:t>
+              <a:t>Twenty-five minutes. One page for the four of you — then each person defends one row you disagreed on.</a:t>
             </a:r>
             <a:endParaRPr/>
           </a:p>
@@ -29379,7 +29379,7 @@
   <p:cSld>
     <p:spTree>
       <p:nvGrpSpPr>
-        <p:cNvPr id="639" name="" descr="&lt;Slide style={{ background: '#FFFFFF', padding: 0 }}&gt;&#10;  &lt;Box style={{ height: 72, background: '#1E4FA8', padding: '0 40px', flexDirection: 'row', alignItems: 'center', justifyContent: 'space-between' }}&gt;&#10;    &lt;Text style={{ fontSize: 15, color: '#B9CDF0', letterSpacing: 1 }}&gt;ISAD · INFORMATION SYSTEMS ANALYSIS &amp;amp; DESIGN&lt;/Text&gt;&#10;    &lt;Text style={{ fontSize: 15, color: '#B9CDF0' }}&gt;W04 · LAB · EXERCISE 4.2&lt;/Text&gt;&#10;  &lt;/Box&gt;&#10;  &lt;Box style={{ padding: '14px 40px 0 40px', flexDirection: 'row', alignItems: 'center', justifyContent: 'space-between' }}&gt;&#10;    &lt;Text style={{ fontSize: 29, fontWeight: 'bold', color: '#0E3F8C' }}&gt;Exercise 4.2 — Draw the Diagram&lt;/Text&gt;&#10;    &lt;Text style={{ fontSize: 14, color: '#1E4FA8', fontWeight: 'bold' }}&gt;35 / 38&lt;/Text&gt;&#10;  &lt;/Box&gt;&#10;  &lt;Box style={{ flex: 1, padding: '12px 40px 0 40px', flexDirection: 'row', gap: 24 }}&gt;&#10;    &lt;Box style={{ flex: 5, flexDirection: 'column', gap: 12 }}&gt;&#10;      &lt;Box style={{ padding: '18px 18px', background: '#F0F5FC', borderRadius: 10, borderLeft: '4px solid #1E4FA8' }}&gt;&#10;        &lt;Text style={{ fontSize: 17, fontWeight: 'bold', color: '#0E3F8C' }}&gt;The task&lt;/Text&gt;&#10;        &lt;Text style={{ fontSize: 13.5, color: '#4A5568', lineHeight: 1.65, marginTop: 6 }}&gt;&#10;          Draw one use case diagram for CampusBites from the Exercise 4.1 narrative. Six to ten use cases, the actors you listed, one &lt;Text style={{ fontWeight: 'bold', color: '#0E3F8C' }}&gt;&amp;lt;&amp;lt;include&amp;gt;&amp;gt;&lt;/Text&gt; and one &lt;Text style={{ fontWeight: 'bold', color: '#0E3F8C' }}&gt;&amp;lt;&amp;lt;extend&amp;gt;&amp;gt;&lt;/Text&gt;. Put the external systems outside the boundary box.&#10;        &lt;/Text&gt;&#10;      &lt;/Box&gt;&#10;      &lt;Box style={{ padding: '16px 18px', background: '#FFFFFF', borderRadius: 10, border: '1px solid #D6DCE5' }}&gt;&#10;        &lt;Text style={{ fontSize: 15.5, fontWeight: 'bold', color: '#0E3F8C' }}&gt;For each dashed arrow, write one sentence&lt;/Text&gt;&#10;        &lt;Text style={{ fontSize: 13, color: '#4A5568', lineHeight: 1.6, marginTop: 5 }}&gt;&#10;          State in words what the relationship means and why the arrow points that way. A diagram without the sentence is a drawing; with it, it is a model.&#10;        &lt;/Text&gt;&#10;      &lt;/Box&gt;&#10;      &lt;Box style={{ padding: '16px 18px', background: '#F7F9FC', borderRadius: 10, border: '1px dashed #D6DCE5' }}&gt;&#10;        &lt;Text style={{ fontSize: 13, color: '#8B97A8', lineHeight: 1.6 }}&gt;&#10;          Deliverable: &lt;Text style={{ color: '#0E3F8C', fontWeight: 'bold' }}&gt;docs/diagrams/use-case-v1.drawio&lt;/Text&gt; plus an exported PNG, committed before you leave. Source file and picture — both, as agreed in Week 03.&#10;        &lt;/Text&gt;&#10;      &lt;/Box&gt;&#10;    &lt;/Box&gt;&#10;    &lt;Box style={{ flex: 4, flexDirection: 'column', justifyContent: 'center' }}&gt;&#10;      &lt;Box style={{ padding: '16px 18px', background: '#FFF6E0', borderRadius: 10, borderLeft: '4px solid #FFC107', marginBottom: 10 }}&gt;&#10;        &lt;Text style={{ fontSize: 16, fontWeight: 'bold', color: '#996F00' }}&gt;Self-check before you hand it in&lt;/Text&gt;&#10;      &lt;/Box&gt;&#10;      {[&#10;        'Every ellipse is named verb plus object, in business words',&#10;        'Every use case belongs to exactly one primary actor',&#10;        'The boundary box is drawn, and its name is at the top',&#10;        'External systems sit outside the box and are drawn as boxes',&#10;        'No “Manage X” and no create-read-update-delete quartet',&#10;        'The include arrow leaves the base and arrives at what it needs',&#10;        'The extend arrow comes back from the extra to the base',&#10;        'Each dashed arrow carries a condition or a reason in words',&#10;      ].map((t) =&gt; (&#10;        &lt;Box key={t} style={{ flexDirection: 'row', alignItems: 'flex-start', gap: 9, marginBottom: 7 }}&gt;&#10;          &lt;Box style={{ width: 13, height: 13, borderRadius: 7, borderWidth: 1.4, borderColor: '#1E4FA8', marginTop: 3 }} /&gt;&#10;          &lt;Box style={{ flex: 1 }}&gt;&#10;            &lt;Text style={{ fontSize: 12.5, color: '#1A2230', lineHeight: 1.5 }}&gt;{t}&lt;/Text&gt;&#10;          &lt;/Box&gt;&#10;        &lt;/Box&gt;&#10;      ))}&#10;    &lt;/Box&gt;&#10;  &lt;/Box&gt;&#10;  &lt;Box style={{ height: 46, background: '#0E3F8C', padding: '0 40px', flexDirection: 'row', alignItems: 'center', justifyContent: 'center' }}&gt;&#10;    &lt;Text style={{ fontSize: 16, color: '#FFFFFF', fontWeight: '600' }}&gt;Thirty minutes to draw, fifteen to defend it to the other team. Answers on the next page.&lt;/Text&gt;&#10;  &lt;/Box&gt;&#10;&lt;/Slide&gt;"/>
+        <p:cNvPr id="639" name="" descr="&lt;Slide style={{ background: '#FFFFFF', padding: 0 }}&gt;&#10;  &lt;Box style={{ height: 72, background: '#1E4FA8', padding: '0 40px', flexDirection: 'row', alignItems: 'center', justifyContent: 'space-between' }}&gt;&#10;    &lt;Text style={{ fontSize: 15, color: '#B9CDF0', letterSpacing: 1 }}&gt;ISAD · INFORMATION SYSTEMS ANALYSIS &amp;amp; DESIGN&lt;/Text&gt;&#10;    &lt;Text style={{ fontSize: 15, color: '#B9CDF0' }}&gt;W04 · LAB · EXERCISE 4.2&lt;/Text&gt;&#10;  &lt;/Box&gt;&#10;  &lt;Box style={{ padding: '14px 40px 0 40px', flexDirection: 'row', alignItems: 'center', justifyContent: 'space-between' }}&gt;&#10;    &lt;Text style={{ fontSize: 29, fontWeight: 'bold', color: '#0E3F8C' }}&gt;Exercise 4.2 — Draw the Diagram&lt;/Text&gt;&#10;    &lt;Text style={{ fontSize: 14, color: '#1E4FA8', fontWeight: 'bold' }}&gt;35 / 38&lt;/Text&gt;&#10;  &lt;/Box&gt;&#10;  &lt;Box style={{ flex: 1, padding: '12px 40px 0 40px', flexDirection: 'row', gap: 24 }}&gt;&#10;    &lt;Box style={{ flex: 5, flexDirection: 'column', gap: 12 }}&gt;&#10;      &lt;Box style={{ padding: '18px 18px', background: '#F0F5FC', borderRadius: 10, borderLeft: '4px solid #1E4FA8' }}&gt;&#10;        &lt;Text style={{ fontSize: 17, fontWeight: 'bold', color: '#0E3F8C' }}&gt;The task&lt;/Text&gt;&#10;        &lt;Text style={{ fontSize: 13.5, color: '#4A5568', lineHeight: 1.65, marginTop: 6 }}&gt;&#10;          Draw one use case diagram for CampusBites from the Exercise 4.1 narrative. Six to ten use cases, the actors you listed, one &lt;Text style={{ fontWeight: 'bold', color: '#0E3F8C' }}&gt;&amp;lt;&amp;lt;include&amp;gt;&amp;gt;&lt;/Text&gt; and one &lt;Text style={{ fontWeight: 'bold', color: '#0E3F8C' }}&gt;&amp;lt;&amp;lt;extend&amp;gt;&amp;gt;&lt;/Text&gt;. Put the external systems outside the boundary box.&#10;        &lt;/Text&gt;&#10;      &lt;/Box&gt;&#10;      &lt;Box style={{ padding: '16px 18px', background: '#FFFFFF', borderRadius: 10, border: '1px solid #D6DCE5' }}&gt;&#10;        &lt;Text style={{ fontSize: 15.5, fontWeight: 'bold', color: '#0E3F8C' }}&gt;For each dashed arrow, write one sentence&lt;/Text&gt;&#10;        &lt;Text style={{ fontSize: 13, color: '#4A5568', lineHeight: 1.6, marginTop: 5 }}&gt;&#10;          State in words what the relationship means and why the arrow points that way. A diagram without the sentence is a drawing; with it, it is a model.&#10;        &lt;/Text&gt;&#10;      &lt;/Box&gt;&#10;      &lt;Box style={{ padding: '16px 18px', background: '#F7F9FC', borderRadius: 10, border: '1px dashed #D6DCE5' }}&gt;&#10;        &lt;Text style={{ fontSize: 13, color: '#8B97A8', lineHeight: 1.6 }}&gt;&#10;          Deliverable: &lt;Text style={{ color: '#0E3F8C', fontWeight: 'bold' }}&gt;docs/diagrams/use-case-v1.drawio&lt;/Text&gt; plus an exported PNG, committed before you leave. Source file and picture — both, as agreed in Week 03.&#10;        &lt;/Text&gt;&#10;      &lt;/Box&gt;&#10;    &lt;/Box&gt;&#10;    &lt;Box style={{ flex: 4, flexDirection: 'column', justifyContent: 'center' }}&gt;&#10;      &lt;Box style={{ padding: '16px 18px', background: '#FFF6E0', borderRadius: 10, borderLeft: '4px solid #FFC107', marginBottom: 10 }}&gt;&#10;        &lt;Text style={{ fontSize: 16, fontWeight: 'bold', color: '#996F00' }}&gt;Self-check before you hand it in&lt;/Text&gt;&#10;      &lt;/Box&gt;&#10;      {[&#10;        'Every ellipse is named verb plus object, in business words',&#10;        'Every use case belongs to exactly one primary actor',&#10;        'The boundary box is drawn, and its name is at the top',&#10;        'External systems sit outside the box and are drawn as boxes',&#10;        'No “Manage X” and no create-read-update-delete quartet',&#10;        'The include arrow leaves the base and arrives at what it needs',&#10;        'The extend arrow comes back from the extra to the base',&#10;        'Each dashed arrow carries a condition or a reason in words',&#10;      ].map((t) =&gt; (&#10;        &lt;Box key={t} style={{ flexDirection: 'row', alignItems: 'flex-start', gap: 9, marginBottom: 7 }}&gt;&#10;          &lt;Box style={{ width: 13, height: 13, borderRadius: 7, borderWidth: 1.4, borderColor: '#1E4FA8', marginTop: 3 }} /&gt;&#10;          &lt;Box style={{ flex: 1 }}&gt;&#10;            &lt;Text style={{ fontSize: 12.5, color: '#1A2230', lineHeight: 1.5 }}&gt;{t}&lt;/Text&gt;&#10;          &lt;/Box&gt;&#10;        &lt;/Box&gt;&#10;      ))}&#10;    &lt;/Box&gt;&#10;  &lt;/Box&gt;&#10;  &lt;Box style={{ height: 46, background: '#0E3F8C', padding: '0 40px', flexDirection: 'row', alignItems: 'center', justifyContent: 'center' }}&gt;&#10;    &lt;Text style={{ fontSize: 16, color: '#FFFFFF', fontWeight: '600' }}&gt;Thirty minutes to draw, fifteen to defend it to the instructor, who is playing the client today. Answers on the next page.&lt;/Text&gt;&#10;  &lt;/Box&gt;&#10;&lt;/Slide&gt;"/>
         <p:cNvGrpSpPr/>
         <p:nvPr/>
       </p:nvGrpSpPr>
@@ -30619,8 +30619,8 @@
         </p:nvSpPr>
         <p:spPr>
           <a:xfrm rot="0" flipH="0" flipV="0">
-            <a:off x="2933700" y="6543675"/>
-            <a:ext cx="6334125" cy="190500"/>
+            <a:off x="1828800" y="6543675"/>
+            <a:ext cx="8543925" cy="190500"/>
           </a:xfrm>
           <a:prstGeom prst="rect"/>
         </p:spPr>
@@ -30640,7 +30640,7 @@
                 <a:latin typeface="Microsoft YaHei"/>
                 <a:ea typeface="Microsoft YaHei"/>
               </a:rPr>
-              <a:t>Thirty minutes to draw, fifteen to defend it to the other team. Answers on the next page.</a:t>
+              <a:t>Thirty minutes to draw, fifteen to defend it to the instructor, who is playing the client today. Answers on the next page.</a:t>
             </a:r>
             <a:endParaRPr/>
           </a:p>
@@ -30967,7 +30967,7 @@
   <p:cSld>
     <p:spTree>
       <p:nvGrpSpPr>
-        <p:cNvPr id="686" name="" descr="&lt;Slide style={{ background: '#FFFFFF', padding: 0 }}&gt;&#10;  &lt;Box style={{ height: 72, background: '#1E4FA8', padding: '0 40px', flexDirection: 'row', alignItems: 'center', justifyContent: 'space-between' }}&gt;&#10;    &lt;Text style={{ fontSize: 15, color: '#B9CDF0', letterSpacing: 1 }}&gt;ISAD · INFORMATION SYSTEMS ANALYSIS &amp;amp; DESIGN&lt;/Text&gt;&#10;    &lt;Text style={{ fontSize: 15, color: '#B9CDF0' }}&gt;W04 · HOMEWORK &amp;amp; M1&lt;/Text&gt;&#10;  &lt;/Box&gt;&#10;  &lt;Box style={{ padding: '14px 40px 0 40px', flexDirection: 'row', alignItems: 'center', justifyContent: 'space-between' }}&gt;&#10;    &lt;Text style={{ fontSize: 29, fontWeight: 'bold', color: '#0E3F8C' }}&gt;Homework &amp;amp; Project M1&lt;/Text&gt;&#10;    &lt;Text style={{ fontSize: 14, color: '#1E4FA8', fontWeight: 'bold' }}&gt;37 / 38&lt;/Text&gt;&#10;  &lt;/Box&gt;&#10;  &lt;Box style={{ flex: 1, padding: '12px 40px 0 40px', flexDirection: 'row', gap: 20 }}&gt;&#10;    &lt;Box style={{ flex: 1, flexDirection: 'column', gap: 10 }}&gt;&#10;      &lt;Box style={{ flexDirection: 'row', alignItems: 'center', gap: 9, marginBottom: 2 }}&gt;&#10;        &lt;FAIcon name='pen-fancy' style={{ fill: '#1E4FA8', width: 18, height: 18 }} /&gt;&#10;        &lt;Text style={{ fontSize: 16.5, fontWeight: 'bold', color: '#0E3F8C' }}&gt;Before next Monday&lt;/Text&gt;&#10;      &lt;/Box&gt;&#10;      {[&#10;        'Finish the diagram — source file and PNG, in docs/diagrams/, pushed',&#10;        'Write two use case briefs: Place Order and one you choose',&#10;        'Read Larman Chapter 6 (use cases) — twenty pages, not all of it',&#10;        'Bring one question the narrative could not answer',&#10;      ].map((t) =&gt; (&#10;        &lt;Box key={t} style={{ flexDirection: 'row', alignItems: 'flex-start', gap: 9 }}&gt;&#10;          &lt;Box style={{ width: 13, height: 13, borderRadius: 7, borderWidth: 1.4, borderColor: '#1E4FA8', marginTop: 3 }} /&gt;&#10;          &lt;Box style={{ flex: 1 }}&gt;&#10;            &lt;Text style={{ fontSize: 13, color: '#1A2230', lineHeight: 1.55 }}&gt;{t}&lt;/Text&gt;&#10;          &lt;/Box&gt;&#10;        &lt;/Box&gt;&#10;      ))}&#10;      &lt;Box style={{ padding: '12px 14px', background: '#FFF6E0', borderRadius: 8, borderLeft: '3px solid #FFC107', marginTop: 4 }}&gt;&#10;        &lt;Text style={{ fontSize: 12.2, color: '#4A5568', lineHeight: 1.55 }}&gt;&#10;          A brief is half a page: the goal in one sentence, the primary actor, and the one thing that can go wrong. Full specifications are Week 05.&#10;        &lt;/Text&gt;&#10;      &lt;/Box&gt;&#10;    &lt;/Box&gt;&#10;    &lt;Box style={{ width: 20 }} /&gt;&#10;    &lt;Box style={{ flex: 1, flexDirection: 'column', gap: 10 }}&gt;&#10;      &lt;Box style={{ flexDirection: 'row', alignItems: 'center', gap: 9, marginBottom: 2 }}&gt;&#10;        &lt;FAIcon name='folder' style={{ fill: '#1E4FA8', width: 18, height: 18 }} /&gt;&#10;        &lt;Text style={{ fontSize: 16.5, fontWeight: 'bold', color: '#0E3F8C' }}&gt;Milestone M1 — due Sunday 4 October&lt;/Text&gt;&#10;      &lt;/Box&gt;&#10;      {[&#10;        'A requirements list: functional and non-functional, each testable',&#10;        'The use case diagram — source file, PNG, and one sentence per dashed arrow',&#10;        'Two use case briefs, written in your own words',&#10;      ].map((t) =&gt; (&#10;        &lt;Box key={t} style={{ padding: '13px 15px', background: '#F0F5FC', borderRadius: 8, borderLeft: '3px solid #1E4FA8' }}&gt;&#10;          &lt;Text style={{ fontSize: 13, color: '#1A2230', lineHeight: 1.55 }}&gt;{t}&lt;/Text&gt;&#10;        &lt;/Box&gt;&#10;      ))}&#10;      &lt;Box style={{ flexDirection: 'row', alignItems: 'center', gap: 9, marginTop: 6, marginBottom: 2 }}&gt;&#10;        &lt;FAIcon name='exclamation-triangle' style={{ fill: '#D9534F', width: 17, height: 17 }} /&gt;&#10;        &lt;Text style={{ fontSize: 16.5, fontWeight: 'bold', color: '#D9534F' }}&gt;How it is submitted&lt;/Text&gt;&#10;      &lt;/Box&gt;&#10;      &lt;Box style={{ padding: '14px 16px', background: '#FDF3F3', borderRadius: 9, border: '1px solid #D9534F' }}&gt;&#10;        &lt;Text style={{ fontSize: 13, color: '#1A2230', lineHeight: 1.6 }}&gt;&#10;          Push to GitHub, then tag it &lt;Text style={{ fontWeight: 'bold', color: '#D9534F' }}&gt;m1&lt;/Text&gt;. A push without a tag is not a submission — the tag is the snapshot that gets graded.&#10;        &lt;/Text&gt;&#10;        &lt;Text style={{ fontSize: 12, color: '#8B97A8', lineHeight: 1.55, marginTop: 6 }}&gt;&#10;          git tag -a m1 -m &quot;M1: requirements, use case diagram, two briefs&quot; &amp;amp;&amp;amp; git push origin m1&#10;        &lt;/Text&gt;&#10;        &lt;Text style={{ fontSize: 12, color: '#8B97A8', lineHeight: 1.55, marginTop: 4 }}&gt;&#10;          Check it landed: git ls-remote --tags origin&#10;        &lt;/Text&gt;&#10;      &lt;/Box&gt;&#10;    &lt;/Box&gt;&#10;  &lt;/Box&gt;&#10;  &lt;Box style={{ height: 46, background: '#0E3F8C', padding: '0 40px', flexDirection: 'row', alignItems: 'center', justifyContent: 'center' }}&gt;&#10;    &lt;Text style={{ fontSize: 16, color: '#FFFFFF', fontWeight: '600' }}&gt;Four weeks to M1. The diagram is due next week; the briefs and the requirements list follow.&lt;/Text&gt;&#10;  &lt;/Box&gt;&#10;&lt;/Slide&gt;"/>
+        <p:cNvPr id="686" name="" descr="&lt;Slide style={{ background: '#FFFFFF', padding: 0 }}&gt;&#10;  &lt;Box style={{ height: 72, background: '#1E4FA8', padding: '0 40px', flexDirection: 'row', alignItems: 'center', justifyContent: 'space-between' }}&gt;&#10;    &lt;Text style={{ fontSize: 15, color: '#B9CDF0', letterSpacing: 1 }}&gt;ISAD · INFORMATION SYSTEMS ANALYSIS &amp;amp; DESIGN&lt;/Text&gt;&#10;    &lt;Text style={{ fontSize: 15, color: '#B9CDF0' }}&gt;W04 · HOMEWORK &amp;amp; M1&lt;/Text&gt;&#10;  &lt;/Box&gt;&#10;  &lt;Box style={{ padding: '14px 40px 0 40px', flexDirection: 'row', alignItems: 'center', justifyContent: 'space-between' }}&gt;&#10;    &lt;Text style={{ fontSize: 29, fontWeight: 'bold', color: '#0E3F8C' }}&gt;Homework &amp;amp; Project M1&lt;/Text&gt;&#10;    &lt;Text style={{ fontSize: 14, color: '#1E4FA8', fontWeight: 'bold' }}&gt;37 / 38&lt;/Text&gt;&#10;  &lt;/Box&gt;&#10;  &lt;Box style={{ flex: 1, padding: '12px 40px 0 40px', flexDirection: 'row', gap: 20 }}&gt;&#10;    &lt;Box style={{ flex: 1, flexDirection: 'column', gap: 10 }}&gt;&#10;      &lt;Box style={{ flexDirection: 'row', alignItems: 'center', gap: 9, marginBottom: 2 }}&gt;&#10;        &lt;FAIcon name='pen-fancy' style={{ fill: '#1E4FA8', width: 18, height: 18 }} /&gt;&#10;        &lt;Text style={{ fontSize: 16.5, fontWeight: 'bold', color: '#0E3F8C' }}&gt;Before next Monday&lt;/Text&gt;&#10;      &lt;/Box&gt;&#10;      {[&#10;        'Finish the diagram — source file and PNG, in docs/diagrams/, pushed',&#10;        'Write two use case briefs: Place Order and one you choose',&#10;        'Read Larman Chapter 6 (use cases) — twenty pages, not all of it',&#10;        'Bring one question the narrative could not answer',&#10;      ].map((t) =&gt; (&#10;        &lt;Box key={t} style={{ flexDirection: 'row', alignItems: 'flex-start', gap: 9 }}&gt;&#10;          &lt;Box style={{ width: 13, height: 13, borderRadius: 7, borderWidth: 1.4, borderColor: '#1E4FA8', marginTop: 3 }} /&gt;&#10;          &lt;Box style={{ flex: 1 }}&gt;&#10;            &lt;Text style={{ fontSize: 13, color: '#1A2230', lineHeight: 1.55 }}&gt;{t}&lt;/Text&gt;&#10;          &lt;/Box&gt;&#10;        &lt;/Box&gt;&#10;      ))}&#10;      &lt;Box style={{ padding: '12px 14px', background: '#FFF6E0', borderRadius: 8, borderLeft: '3px solid #FFC107', marginTop: 4 }}&gt;&#10;        &lt;Text style={{ fontSize: 12.2, color: '#4A5568', lineHeight: 1.55 }}&gt;&#10;          A brief is half a page: the goal in one sentence, the primary actor, and the one thing that can go wrong. Full specifications are Week 05.&#10;        &lt;/Text&gt;&#10;      &lt;/Box&gt;&#10;    &lt;/Box&gt;&#10;    &lt;Box style={{ width: 20 }} /&gt;&#10;    &lt;Box style={{ flex: 1, flexDirection: 'column', gap: 10 }}&gt;&#10;      &lt;Box style={{ flexDirection: 'row', alignItems: 'center', gap: 9, marginBottom: 2 }}&gt;&#10;        &lt;FAIcon name='folder' style={{ fill: '#1E4FA8', width: 18, height: 18 }} /&gt;&#10;        &lt;Text style={{ fontSize: 16.5, fontWeight: 'bold', color: '#0E3F8C' }}&gt;Milestone M1 — due Sunday 4 October&lt;/Text&gt;&#10;      &lt;/Box&gt;&#10;      {[&#10;        'A requirements list: functional and non-functional, each testable',&#10;        'The use case diagram — source file, PNG, and one sentence per dashed arrow',&#10;        'Two use case briefs, written in your own words',&#10;      ].map((t) =&gt; (&#10;        &lt;Box key={t} style={{ padding: '13px 15px', background: '#F0F5FC', borderRadius: 8, borderLeft: '3px solid #1E4FA8' }}&gt;&#10;          &lt;Text style={{ fontSize: 13, color: '#1A2230', lineHeight: 1.55 }}&gt;{t}&lt;/Text&gt;&#10;        &lt;/Box&gt;&#10;      ))}&#10;      &lt;Box style={{ flexDirection: 'row', alignItems: 'center', gap: 9, marginTop: 6, marginBottom: 2 }}&gt;&#10;        &lt;FAIcon name='exclamation-triangle' style={{ fill: '#D9534F', width: 17, height: 17 }} /&gt;&#10;        &lt;Text style={{ fontSize: 16.5, fontWeight: 'bold', color: '#D9534F' }}&gt;How it is submitted&lt;/Text&gt;&#10;      &lt;/Box&gt;&#10;      &lt;Box style={{ padding: '14px 16px', background: '#FDF3F3', borderRadius: 9, border: '1px solid #D9534F' }}&gt;&#10;        &lt;Text style={{ fontSize: 13, color: '#1A2230', lineHeight: 1.6 }}&gt;&#10;          Push to GitHub, then tag it &lt;Text style={{ fontWeight: 'bold', color: '#D9534F' }}&gt;m1&lt;/Text&gt;. A push without a tag is not a submission — the tag is the snapshot that gets graded.&#10;        &lt;/Text&gt;&#10;        &lt;Text style={{ fontSize: 12, color: '#8B97A8', lineHeight: 1.55, marginTop: 6 }}&gt;&#10;          git tag -a m1 -m &quot;M1: requirements, use case diagram, two briefs&quot; &amp;amp;&amp;amp; git push origin m1&#10;        &lt;/Text&gt;&#10;        &lt;Text style={{ fontSize: 12, color: '#8B97A8', lineHeight: 1.55, marginTop: 4 }}&gt;&#10;          Check it landed: git ls-remote --tags origin&#10;        &lt;/Text&gt;&#10;      &lt;/Box&gt;&#10;    &lt;/Box&gt;&#10;  &lt;/Box&gt;&#10;  &lt;Box style={{ height: 46, background: '#0E3F8C', padding: '0 40px', flexDirection: 'row', alignItems: 'center', justifyContent: 'center' }}&gt;&#10;    &lt;Text style={{ fontSize: 16, color: '#FFFFFF', fontWeight: '600' }}&gt;M1 closes on Sunday 4 October. The diagram is due next week; the briefs and the requirements list follow.&lt;/Text&gt;&#10;  &lt;/Box&gt;&#10;&lt;/Slide&gt;"/>
         <p:cNvGrpSpPr/>
         <p:nvPr/>
       </p:nvGrpSpPr>
@@ -32281,8 +32281,8 @@
         </p:nvSpPr>
         <p:spPr>
           <a:xfrm rot="0" flipH="0" flipV="0">
-            <a:off x="2762250" y="6543675"/>
-            <a:ext cx="6677025" cy="190500"/>
+            <a:off x="2247900" y="6543675"/>
+            <a:ext cx="7696200" cy="190500"/>
           </a:xfrm>
           <a:prstGeom prst="rect"/>
         </p:spPr>
@@ -32302,7 +32302,7 @@
                 <a:latin typeface="Microsoft YaHei"/>
                 <a:ea typeface="Microsoft YaHei"/>
               </a:rPr>
-              <a:t>Four weeks to M1. The diagram is due next week; the briefs and the requirements list follow.</a:t>
+              <a:t>M1 closes on Sunday 4 October. The diagram is due next week; the briefs and the requirements list follow.</a:t>
             </a:r>
             <a:endParaRPr/>
           </a:p>

--- a/01-slides/W04-Requirements-and-Use-Case-Modeling.pptx
+++ b/01-slides/W04-Requirements-and-Use-Case-Modeling.pptx
@@ -23370,7 +23370,7 @@
   <p:cSld>
     <p:spTree>
       <p:nvGrpSpPr>
-        <p:cNvPr id="571" name="" descr="&lt;Slide style={{ background: '#FFFFFF', padding: 0 }}&gt;&#10;  &lt;Box style={{ height: 72, background: '#1E4FA8', padding: '0 40px', flexDirection: 'row', alignItems: 'center', justifyContent: 'space-between' }}&gt;&#10;    &lt;Text style={{ fontSize: 15, color: '#B9CDF0', letterSpacing: 1 }}&gt;ISAD · INFORMATION SYSTEMS ANALYSIS &amp;amp; DESIGN&lt;/Text&gt;&#10;    &lt;Text style={{ fontSize: 15, color: '#B9CDF0' }}&gt;W04 · LAB · EXERCISE 4.1&lt;/Text&gt;&#10;  &lt;/Box&gt;&#10;  &lt;Box style={{ padding: '14px 40px 0 40px', flexDirection: 'row', alignItems: 'center', justifyContent: 'space-between' }}&gt;&#10;    &lt;Text style={{ fontSize: 29, fontWeight: 'bold', color: '#0E3F8C' }}&gt;Exercise 4.1 — The Narrative&lt;/Text&gt;&#10;    &lt;Text style={{ fontSize: 14, color: '#1E4FA8', fontWeight: 'bold' }}&gt;31 / 38&lt;/Text&gt;&#10;  &lt;/Box&gt;&#10;  &lt;Box style={{ flex: 1, padding: '10px 40px 0 40px', flexDirection: 'row', gap: 26 }}&gt;&#10;    &lt;Box style={{ flex: 5, justifyContent: 'center' }}&gt;&#10;      &lt;CodeBlock code={`CampusBites — Requirements Pack, section 2.1 (extract)&#10;&#10;Students on the Dalian campus order lunch from the&#10;restaurants on campus. A student opens the app, browses&#10;today's menu of a restaurant, selects items, and places&#10;an order. The system authenticates the student against&#10;the campus card centre, calculates the total, and&#10;charges the campus card, a wallet, or cash on delivery.&#10;&#10;Restaurant staff keep the menu current. A manager marks&#10;an item sold out before service starts; the kitchen&#10;receives the order on a wall tablet. When an order is&#10;ready, a dispatcher assigns a courier. The courier picks&#10;up the order, delivers it to the student, and confirms&#10;the delivery in the app.&#10;&#10;After delivery the student may rate the restaurant and&#10;the courier. The platform administrator can suspend a&#10;restaurant that receives three ratings below two stars&#10;in one week. Every evening at 23:00 the system closes&#10;the day and emails a sales report to each restaurant.`} language='text' /&gt;&#10;    &lt;/Box&gt;&#10;    &lt;Box style={{ flex: 2, flexDirection: 'column', justifyContent: 'center', gap: 12 }}&gt;&#10;      &lt;Box style={{ padding: '15px 17px', background: '#F0F5FC', borderRadius: 9, borderLeft: '4px solid #1E4FA8' }}&gt;&#10;        &lt;Text style={{ fontSize: 15.5, fontWeight: 'bold', color: '#0E3F8C' }}&gt;This is real&lt;/Text&gt;&#10;        &lt;Text style={{ fontSize: 12.8, color: '#4A5568', lineHeight: 1.6, marginTop: 5 }}&gt;&#10;          This is the extract your team has in the pack. The full version has four more paragraphs; the lab works on this one.&#10;        &lt;/Text&gt;&#10;      &lt;/Box&gt;&#10;      &lt;Box style={{ padding: '15px 17px', background: '#FFF6E0', borderRadius: 9, borderLeft: '4px solid #FFC107' }}&gt;&#10;        &lt;Text style={{ fontSize: 15.5, fontWeight: 'bold', color: '#996F00' }}&gt;Read it twice&lt;/Text&gt;&#10;        &lt;Text style={{ fontSize: 12.8, color: '#4A5568', lineHeight: 1.6, marginTop: 5 }}&gt;&#10;          First time for the story. Second time with a pen, marking nouns and verbs as we did on page 27.&#10;        &lt;/Text&gt;&#10;      &lt;/Box&gt;&#10;      &lt;Box style={{ padding: '15px 17px', background: '#FFFFFF', borderRadius: 9, border: '1px dashed #D6DCE5' }}&gt;&#10;        &lt;Text style={{ fontSize: 12.8, color: '#8B97A8', lineHeight: 1.6 }}&gt;&#10;          Do not start drawing yet. A diagram drawn from a half-read paragraph has to be drawn twice.&#10;        &lt;/Text&gt;&#10;      &lt;/Box&gt;&#10;    &lt;/Box&gt;&#10;  &lt;/Box&gt;&#10;  &lt;Box style={{ height: 46, background: '#0E3F8C', padding: '0 40px', flexDirection: 'row', alignItems: 'center', justifyContent: 'center' }}&gt;&#10;    &lt;Text style={{ fontSize: 16, color: '#FFFFFF', fontWeight: '600' }}&gt;Fifteen minutes with the text. It is the cheapest fifteen minutes you will spend this week.&lt;/Text&gt;&#10;  &lt;/Box&gt;&#10;&lt;/Slide&gt;"/>
+        <p:cNvPr id="571" name="" descr="&lt;Slide style={{ background: '#FFFFFF', padding: 0 }}&gt;&#10;  &lt;Box style={{ height: 72, background: '#1E4FA8', padding: '0 40px', flexDirection: 'row', alignItems: 'center', justifyContent: 'space-between' }}&gt;&#10;    &lt;Text style={{ fontSize: 15, color: '#B9CDF0', letterSpacing: 1 }}&gt;ISAD · INFORMATION SYSTEMS ANALYSIS &amp;amp; DESIGN&lt;/Text&gt;&#10;    &lt;Text style={{ fontSize: 15, color: '#B9CDF0' }}&gt;W04 · LAB · EXERCISE 4.1&lt;/Text&gt;&#10;  &lt;/Box&gt;&#10;  &lt;Box style={{ padding: '14px 40px 0 40px', flexDirection: 'row', alignItems: 'center', justifyContent: 'space-between' }}&gt;&#10;    &lt;Text style={{ fontSize: 29, fontWeight: 'bold', color: '#0E3F8C' }}&gt;Exercise 4.1 — The Narrative&lt;/Text&gt;&#10;    &lt;Text style={{ fontSize: 14, color: '#1E4FA8', fontWeight: 'bold' }}&gt;31 / 38&lt;/Text&gt;&#10;  &lt;/Box&gt;&#10;  &lt;Box style={{ flex: 1, padding: '10px 40px 0 40px', flexDirection: 'row', gap: 26 }}&gt;&#10;    &lt;Box style={{ flex: 5, justifyContent: 'center' }}&gt;&#10;      &lt;CodeBlock theme='one-dark-pro' code={`CampusBites — Requirements Pack, section 2.1 (extract)&#10;&#10;Students on the Dalian campus order lunch from the&#10;restaurants on campus. A student opens the app, browses&#10;today's menu of a restaurant, selects items, and places&#10;an order. The system authenticates the student against&#10;the campus card centre, calculates the total, and&#10;charges the campus card, a wallet, or cash on delivery.&#10;&#10;Restaurant staff keep the menu current. A manager marks&#10;an item sold out before service starts; the kitchen&#10;receives the order on a wall tablet. When an order is&#10;ready, a dispatcher assigns a courier. The courier picks&#10;up the order, delivers it to the student, and confirms&#10;the delivery in the app.&#10;&#10;After delivery the student may rate the restaurant and&#10;the courier. The platform administrator can suspend a&#10;restaurant that receives three ratings below two stars&#10;in one week. Every evening at 23:00 the system closes&#10;the day and emails a sales report to each restaurant.`} language='text' /&gt;&#10;    &lt;/Box&gt;&#10;    &lt;Box style={{ flex: 2, flexDirection: 'column', justifyContent: 'center', gap: 12 }}&gt;&#10;      &lt;Box style={{ padding: '15px 17px', background: '#F0F5FC', borderRadius: 9, borderLeft: '4px solid #1E4FA8' }}&gt;&#10;        &lt;Text style={{ fontSize: 15.5, fontWeight: 'bold', color: '#0E3F8C' }}&gt;This is real&lt;/Text&gt;&#10;        &lt;Text style={{ fontSize: 12.8, color: '#4A5568', lineHeight: 1.6, marginTop: 5 }}&gt;&#10;          This is the extract your team has in the pack. The full version has four more paragraphs; the lab works on this one.&#10;        &lt;/Text&gt;&#10;      &lt;/Box&gt;&#10;      &lt;Box style={{ padding: '15px 17px', background: '#FFF6E0', borderRadius: 9, borderLeft: '4px solid #FFC107' }}&gt;&#10;        &lt;Text style={{ fontSize: 15.5, fontWeight: 'bold', color: '#996F00' }}&gt;Read it twice&lt;/Text&gt;&#10;        &lt;Text style={{ fontSize: 12.8, color: '#4A5568', lineHeight: 1.6, marginTop: 5 }}&gt;&#10;          First time for the story. Second time with a pen, marking nouns and verbs as we did on page 27.&#10;        &lt;/Text&gt;&#10;      &lt;/Box&gt;&#10;      &lt;Box style={{ padding: '15px 17px', background: '#FFFFFF', borderRadius: 9, border: '1px dashed #D6DCE5' }}&gt;&#10;        &lt;Text style={{ fontSize: 12.8, color: '#8B97A8', lineHeight: 1.6 }}&gt;&#10;          Do not start drawing yet. A diagram drawn from a half-read paragraph has to be drawn twice.&#10;        &lt;/Text&gt;&#10;      &lt;/Box&gt;&#10;    &lt;/Box&gt;&#10;  &lt;/Box&gt;&#10;  &lt;Box style={{ height: 46, background: '#0E3F8C', padding: '0 40px', flexDirection: 'row', alignItems: 'center', justifyContent: 'center' }}&gt;&#10;    &lt;Text style={{ fontSize: 16, color: '#FFFFFF', fontWeight: '600' }}&gt;Fifteen minutes with the text. It is the cheapest fifteen minutes you will spend this week.&lt;/Text&gt;&#10;  &lt;/Box&gt;&#10;&lt;/Slide&gt;"/>
         <p:cNvGrpSpPr/>
         <p:nvPr/>
       </p:nvGrpSpPr>
@@ -24015,16 +24015,16 @@
         </p:nvSpPr>
         <p:spPr>
           <a:xfrm rot="0" flipH="0" flipV="0">
-            <a:off x="381000" y="1685925"/>
-            <a:ext cx="7991475" cy="4305300"/>
+            <a:off x="381000" y="2257425"/>
+            <a:ext cx="7991475" cy="3152775"/>
           </a:xfrm>
           <a:prstGeom prst="roundRect">
             <a:avLst>
-              <a:gd name="adj" fmla="val 1770"/>
+              <a:gd name="adj" fmla="val 2417"/>
             </a:avLst>
           </a:prstGeom>
           <a:solidFill>
-            <a:srgbClr val="F6F8FA"/>
+            <a:srgbClr val="0E1116"/>
           </a:solidFill>
           <a:ln/>
         </p:spPr>
@@ -24041,8 +24041,8 @@
         </p:nvSpPr>
         <p:spPr>
           <a:xfrm rot="0" flipH="0" flipV="0">
-            <a:off x="533400" y="1819275"/>
-            <a:ext cx="7686675" cy="4038600"/>
+            <a:off x="533400" y="2390775"/>
+            <a:ext cx="7686675" cy="2886075"/>
           </a:xfrm>
           <a:prstGeom prst="rect"/>
         </p:spPr>
@@ -24051,11 +24051,7 @@
             <a:normAutofit/>
           </a:bodyPr>
           <a:p>
-            <a:pPr>
-              <a:lnSpc>
-                <a:spcPct val="140000"/>
-              </a:lnSpc>
-            </a:pPr>
+            <a:pPr/>
             <a:r>
               <a:rPr sz="900">
                 <a:solidFill>
@@ -24064,337 +24060,24 @@
                 <a:latin typeface="Menlo"/>
                 <a:ea typeface="Menlo"/>
               </a:rPr>
-              <a:t>CampusBites — Requirements Pack, section 2.1 (extract)</a:t>
-            </a:r>
-            <a:endParaRPr/>
-          </a:p>
-          <a:p>
-            <a:pPr>
-              <a:lnSpc>
-                <a:spcPct val="140000"/>
-              </a:lnSpc>
-            </a:pPr>
-            <a:endParaRPr/>
-          </a:p>
-          <a:p>
-            <a:pPr>
-              <a:lnSpc>
-                <a:spcPct val="140000"/>
-              </a:lnSpc>
-            </a:pPr>
-            <a:r>
-              <a:rPr sz="900">
-                <a:solidFill>
-                  <a:srgbClr val="E5E7EB"/>
-                </a:solidFill>
-                <a:latin typeface="Menlo"/>
-                <a:ea typeface="Menlo"/>
-              </a:rPr>
-              <a:t>Students on the Dalian campus order lunch from the</a:t>
-            </a:r>
-            <a:endParaRPr/>
-          </a:p>
-          <a:p>
-            <a:pPr>
-              <a:lnSpc>
-                <a:spcPct val="140000"/>
-              </a:lnSpc>
-            </a:pPr>
-            <a:r>
-              <a:rPr sz="900">
-                <a:solidFill>
-                  <a:srgbClr val="E5E7EB"/>
-                </a:solidFill>
-                <a:latin typeface="Menlo"/>
-                <a:ea typeface="Menlo"/>
-              </a:rPr>
-              <a:t>restaurants on campus. A student opens the app, browses</a:t>
-            </a:r>
-            <a:endParaRPr/>
-          </a:p>
-          <a:p>
-            <a:pPr>
-              <a:lnSpc>
-                <a:spcPct val="140000"/>
-              </a:lnSpc>
-            </a:pPr>
-            <a:r>
-              <a:rPr sz="900">
-                <a:solidFill>
-                  <a:srgbClr val="E5E7EB"/>
-                </a:solidFill>
-                <a:latin typeface="Menlo"/>
-                <a:ea typeface="Menlo"/>
-              </a:rPr>
-              <a:t>today's menu of a restaurant, selects items, and places</a:t>
-            </a:r>
-            <a:endParaRPr/>
-          </a:p>
-          <a:p>
-            <a:pPr>
-              <a:lnSpc>
-                <a:spcPct val="140000"/>
-              </a:lnSpc>
-            </a:pPr>
-            <a:r>
-              <a:rPr sz="900">
-                <a:solidFill>
-                  <a:srgbClr val="E5E7EB"/>
-                </a:solidFill>
-                <a:latin typeface="Menlo"/>
-                <a:ea typeface="Menlo"/>
-              </a:rPr>
-              <a:t>an order. The system authenticates the student against</a:t>
-            </a:r>
-            <a:endParaRPr/>
-          </a:p>
-          <a:p>
-            <a:pPr>
-              <a:lnSpc>
-                <a:spcPct val="140000"/>
-              </a:lnSpc>
-            </a:pPr>
-            <a:r>
-              <a:rPr sz="900">
-                <a:solidFill>
-                  <a:srgbClr val="E5E7EB"/>
-                </a:solidFill>
-                <a:latin typeface="Menlo"/>
-                <a:ea typeface="Menlo"/>
-              </a:rPr>
-              <a:t>the campus card centre, calculates the total, and</a:t>
-            </a:r>
-            <a:endParaRPr/>
-          </a:p>
-          <a:p>
-            <a:pPr>
-              <a:lnSpc>
-                <a:spcPct val="140000"/>
-              </a:lnSpc>
-            </a:pPr>
-            <a:r>
-              <a:rPr sz="900">
-                <a:solidFill>
-                  <a:srgbClr val="E5E7EB"/>
-                </a:solidFill>
-                <a:latin typeface="Menlo"/>
-                <a:ea typeface="Menlo"/>
-              </a:rPr>
-              <a:t>charges the campus card, a wallet, or cash on delivery.</a:t>
-            </a:r>
-            <a:endParaRPr/>
-          </a:p>
-          <a:p>
-            <a:pPr>
-              <a:lnSpc>
-                <a:spcPct val="140000"/>
-              </a:lnSpc>
-            </a:pPr>
-            <a:endParaRPr/>
-          </a:p>
-          <a:p>
-            <a:pPr>
-              <a:lnSpc>
-                <a:spcPct val="140000"/>
-              </a:lnSpc>
-            </a:pPr>
-            <a:r>
-              <a:rPr sz="900">
-                <a:solidFill>
-                  <a:srgbClr val="E5E7EB"/>
-                </a:solidFill>
-                <a:latin typeface="Menlo"/>
-                <a:ea typeface="Menlo"/>
-              </a:rPr>
-              <a:t>Restaurant staff keep the menu current. A manager marks</a:t>
-            </a:r>
-            <a:endParaRPr/>
-          </a:p>
-          <a:p>
-            <a:pPr>
-              <a:lnSpc>
-                <a:spcPct val="140000"/>
-              </a:lnSpc>
-            </a:pPr>
-            <a:r>
-              <a:rPr sz="900">
-                <a:solidFill>
-                  <a:srgbClr val="E5E7EB"/>
-                </a:solidFill>
-                <a:latin typeface="Menlo"/>
-                <a:ea typeface="Menlo"/>
-              </a:rPr>
-              <a:t>an item sold out before service starts; the kitchen</a:t>
-            </a:r>
-            <a:endParaRPr/>
-          </a:p>
-          <a:p>
-            <a:pPr>
-              <a:lnSpc>
-                <a:spcPct val="140000"/>
-              </a:lnSpc>
-            </a:pPr>
-            <a:r>
-              <a:rPr sz="900">
-                <a:solidFill>
-                  <a:srgbClr val="E5E7EB"/>
-                </a:solidFill>
-                <a:latin typeface="Menlo"/>
-                <a:ea typeface="Menlo"/>
-              </a:rPr>
-              <a:t>receives the order on a wall tablet. When an order is</a:t>
-            </a:r>
-            <a:endParaRPr/>
-          </a:p>
-          <a:p>
-            <a:pPr>
-              <a:lnSpc>
-                <a:spcPct val="140000"/>
-              </a:lnSpc>
-            </a:pPr>
-            <a:r>
-              <a:rPr sz="900">
-                <a:solidFill>
-                  <a:srgbClr val="E5E7EB"/>
-                </a:solidFill>
-                <a:latin typeface="Menlo"/>
-                <a:ea typeface="Menlo"/>
-              </a:rPr>
-              <a:t>ready, a dispatcher assigns a courier. The courier picks</a:t>
-            </a:r>
-            <a:endParaRPr/>
-          </a:p>
-          <a:p>
-            <a:pPr>
-              <a:lnSpc>
-                <a:spcPct val="140000"/>
-              </a:lnSpc>
-            </a:pPr>
-            <a:r>
-              <a:rPr sz="900">
-                <a:solidFill>
-                  <a:srgbClr val="E5E7EB"/>
-                </a:solidFill>
-                <a:latin typeface="Menlo"/>
-                <a:ea typeface="Menlo"/>
-              </a:rPr>
-              <a:t>up the order, delivers it to the student, and confirms</a:t>
-            </a:r>
-            <a:endParaRPr/>
-          </a:p>
-          <a:p>
-            <a:pPr>
-              <a:lnSpc>
-                <a:spcPct val="140000"/>
-              </a:lnSpc>
-            </a:pPr>
-            <a:r>
-              <a:rPr sz="900">
-                <a:solidFill>
-                  <a:srgbClr val="E5E7EB"/>
-                </a:solidFill>
-                <a:latin typeface="Menlo"/>
-                <a:ea typeface="Menlo"/>
-              </a:rPr>
-              <a:t>the delivery in the app.</a:t>
-            </a:r>
-            <a:endParaRPr/>
-          </a:p>
-          <a:p>
-            <a:pPr>
-              <a:lnSpc>
-                <a:spcPct val="140000"/>
-              </a:lnSpc>
-            </a:pPr>
-            <a:endParaRPr/>
-          </a:p>
-          <a:p>
-            <a:pPr>
-              <a:lnSpc>
-                <a:spcPct val="140000"/>
-              </a:lnSpc>
-            </a:pPr>
-            <a:r>
-              <a:rPr sz="900">
-                <a:solidFill>
-                  <a:srgbClr val="E5E7EB"/>
-                </a:solidFill>
-                <a:latin typeface="Menlo"/>
-                <a:ea typeface="Menlo"/>
-              </a:rPr>
-              <a:t>After delivery the student may rate the restaurant and</a:t>
-            </a:r>
-            <a:endParaRPr/>
-          </a:p>
-          <a:p>
-            <a:pPr>
-              <a:lnSpc>
-                <a:spcPct val="140000"/>
-              </a:lnSpc>
-            </a:pPr>
-            <a:r>
-              <a:rPr sz="900">
-                <a:solidFill>
-                  <a:srgbClr val="E5E7EB"/>
-                </a:solidFill>
-                <a:latin typeface="Menlo"/>
-                <a:ea typeface="Menlo"/>
-              </a:rPr>
-              <a:t>the courier. The platform administrator can suspend a</a:t>
-            </a:r>
-            <a:endParaRPr/>
-          </a:p>
-          <a:p>
-            <a:pPr>
-              <a:lnSpc>
-                <a:spcPct val="140000"/>
-              </a:lnSpc>
-            </a:pPr>
-            <a:r>
-              <a:rPr sz="900">
-                <a:solidFill>
-                  <a:srgbClr val="E5E7EB"/>
-                </a:solidFill>
-                <a:latin typeface="Menlo"/>
-                <a:ea typeface="Menlo"/>
-              </a:rPr>
-              <a:t>restaurant that receives three ratings below two stars</a:t>
-            </a:r>
-            <a:endParaRPr/>
-          </a:p>
-          <a:p>
-            <a:pPr>
-              <a:lnSpc>
-                <a:spcPct val="140000"/>
-              </a:lnSpc>
-            </a:pPr>
-            <a:r>
-              <a:rPr sz="900">
-                <a:solidFill>
-                  <a:srgbClr val="E5E7EB"/>
-                </a:solidFill>
-                <a:latin typeface="Menlo"/>
-                <a:ea typeface="Menlo"/>
-              </a:rPr>
-              <a:t>in one week. Every evening at 23:00 the system closes</a:t>
-            </a:r>
-            <a:endParaRPr/>
-          </a:p>
-          <a:p>
-            <a:pPr>
-              <a:lnSpc>
-                <a:spcPct val="140000"/>
-              </a:lnSpc>
-            </a:pPr>
-            <a:r>
-              <a:rPr sz="900">
-                <a:solidFill>
-                  <a:srgbClr val="E5E7EB"/>
-                </a:solidFill>
-                <a:latin typeface="Menlo"/>
-                <a:ea typeface="Menlo"/>
-              </a:rPr>
-              <a:t>the day and emails a sales report to each restaurant.</a:t>
+              <a:t>CampusBites — Requirements Pack, section 2.1 (extract)
+Students on the Dalian campus order lunch from the
+restaurants on campus. A student opens the app, browses
+today's menu of a restaurant, selects items, and places
+an order. The system authenticates the student against
+the campus card centre, calculates the total, and
+charges the campus card, a wallet, or cash on delivery.
+Restaurant staff keep the menu current. A manager marks
+an item sold out before service starts; the kitchen
+receives the order on a wall tablet. When an order is
+ready, a dispatcher assigns a courier. The courier picks
+up the order, delivers it to the student, and confirms
+the delivery in the app.
+After delivery the student may rate the restaurant and
+the courier. The platform administrator can suspend a
+restaurant that receives three ratings below two stars
+in one week. Every evening at 23:00 the system closes
+the day and emails a sales report to each restaurant.</a:t>
             </a:r>
             <a:endParaRPr/>
           </a:p>
